--- a/public/lessons/year-6-maths/autumn/week-3/solve-long-multiplication-problems/teaching-powerpoint-v1.pptx
+++ b/public/lessons/year-6-maths/autumn/week-3/solve-long-multiplication-problems/teaching-powerpoint-v1.pptx
@@ -2,24 +2,24 @@
 <file path=ppt/presentation.xml><?xml version="1.0" encoding="utf-8"?>
 <p:presentation xmlns:p="http://schemas.openxmlformats.org/presentationml/2006/main">
   <p:sldMasterIdLst>
-    <p:sldMasterId xmlns:r="http://schemas.openxmlformats.org/officeDocument/2006/relationships" id="2147483648" r:id="R0df52d228c1847c8"/>
+    <p:sldMasterId xmlns:r="http://schemas.openxmlformats.org/officeDocument/2006/relationships" id="2147483648" r:id="R37568c6bcbf34764"/>
   </p:sldMasterIdLst>
   <p:notesMasterIdLst>
-    <p:notesMasterId xmlns:r="http://schemas.openxmlformats.org/officeDocument/2006/relationships" r:id="Rae2d33be667740d7"/>
+    <p:notesMasterId xmlns:r="http://schemas.openxmlformats.org/officeDocument/2006/relationships" r:id="R13d93821f5724f54"/>
   </p:notesMasterIdLst>
   <p:sldIdLst>
-    <p:sldId xmlns:r="http://schemas.openxmlformats.org/officeDocument/2006/relationships" id="256" r:id="R274369a3916c4a29"/>
-    <p:sldId xmlns:r="http://schemas.openxmlformats.org/officeDocument/2006/relationships" id="257" r:id="R3e9ed2c246074764"/>
-    <p:sldId xmlns:r="http://schemas.openxmlformats.org/officeDocument/2006/relationships" id="258" r:id="R6882552fc75341fe"/>
-    <p:sldId xmlns:r="http://schemas.openxmlformats.org/officeDocument/2006/relationships" id="259" r:id="Re3de8354c7b448c1"/>
-    <p:sldId xmlns:r="http://schemas.openxmlformats.org/officeDocument/2006/relationships" id="260" r:id="R0c4f78222bde46eb"/>
-    <p:sldId xmlns:r="http://schemas.openxmlformats.org/officeDocument/2006/relationships" id="261" r:id="R9843edc62e3143e7"/>
-    <p:sldId xmlns:r="http://schemas.openxmlformats.org/officeDocument/2006/relationships" id="262" r:id="R5902f02ca2e044c1"/>
-    <p:sldId xmlns:r="http://schemas.openxmlformats.org/officeDocument/2006/relationships" id="263" r:id="Ra7d983e4bc904f35"/>
-    <p:sldId xmlns:r="http://schemas.openxmlformats.org/officeDocument/2006/relationships" id="264" r:id="R8496826376f441db"/>
-    <p:sldId xmlns:r="http://schemas.openxmlformats.org/officeDocument/2006/relationships" id="265" r:id="Re6cb42730a4143ad"/>
-    <p:sldId xmlns:r="http://schemas.openxmlformats.org/officeDocument/2006/relationships" id="266" r:id="R45323da612734208"/>
-    <p:sldId xmlns:r="http://schemas.openxmlformats.org/officeDocument/2006/relationships" id="267" r:id="R19e5895900054c0c"/>
+    <p:sldId xmlns:r="http://schemas.openxmlformats.org/officeDocument/2006/relationships" id="256" r:id="R6fd8beceebad4891"/>
+    <p:sldId xmlns:r="http://schemas.openxmlformats.org/officeDocument/2006/relationships" id="257" r:id="R4eb6095b93704d07"/>
+    <p:sldId xmlns:r="http://schemas.openxmlformats.org/officeDocument/2006/relationships" id="258" r:id="R5cea0d2e49a946ce"/>
+    <p:sldId xmlns:r="http://schemas.openxmlformats.org/officeDocument/2006/relationships" id="259" r:id="R54d06fe929374a83"/>
+    <p:sldId xmlns:r="http://schemas.openxmlformats.org/officeDocument/2006/relationships" id="260" r:id="Re308feadbd174ca1"/>
+    <p:sldId xmlns:r="http://schemas.openxmlformats.org/officeDocument/2006/relationships" id="261" r:id="R38e1ad0678ab4159"/>
+    <p:sldId xmlns:r="http://schemas.openxmlformats.org/officeDocument/2006/relationships" id="262" r:id="Re62696447d514b55"/>
+    <p:sldId xmlns:r="http://schemas.openxmlformats.org/officeDocument/2006/relationships" id="263" r:id="Rfa486e86442b419f"/>
+    <p:sldId xmlns:r="http://schemas.openxmlformats.org/officeDocument/2006/relationships" id="264" r:id="R7f6d41534bbf4980"/>
+    <p:sldId xmlns:r="http://schemas.openxmlformats.org/officeDocument/2006/relationships" id="265" r:id="R5fdd7777bacb4a5f"/>
+    <p:sldId xmlns:r="http://schemas.openxmlformats.org/officeDocument/2006/relationships" id="266" r:id="R48af1a18f1734bbf"/>
+    <p:sldId xmlns:r="http://schemas.openxmlformats.org/officeDocument/2006/relationships" id="267" r:id="R5ac3f83d0fc54a1d"/>
   </p:sldIdLst>
   <p:sldSz cx="12192000" cy="6858000"/>
   <p:notesSz cx="6858000" cy="9144000"/>
@@ -873,7 +873,7 @@
           <a:lstStyle xmlns:a="http://schemas.openxmlformats.org/drawingml/2006/main"/>
           <a:p xmlns:a="http://schemas.openxmlformats.org/drawingml/2006/main">
             <a:r>
-              <a:t>I do. Reveal the question, setup and each calculation stage one click at a time. Pupils watch before copying. Model answer: 29,952 seats.</a:t>
+              <a:t>I do. Reveal the question, then reveal each mathematical change one click at a time. Point to the numbers and operation that changed before moving to the next line. Final answer: 29,952 seats.</a:t>
             </a:r>
           </a:p>
         </p:txBody>
@@ -1291,7 +1291,7 @@
   </p:cSld>
   <p:clrMap bg1="lt1" tx1="dk1" bg2="lt2" tx2="dk2" accent1="accent1" accent2="accent2" accent3="accent3" accent4="accent4" accent5="accent5" accent6="accent6" hlink="hlink" folHlink="folHlink"/>
   <p:sldLayoutIdLst>
-    <p:sldLayoutId xmlns:r="http://schemas.openxmlformats.org/officeDocument/2006/relationships" id="2147483649" r:id="R2f3c35c66e084d57"/>
+    <p:sldLayoutId xmlns:r="http://schemas.openxmlformats.org/officeDocument/2006/relationships" id="2147483649" r:id="Rd84c937db30945e2"/>
   </p:sldLayoutIdLst>
   <p:txStyles>
     <p:titleStyle>
@@ -1842,7 +1842,7 @@
           <p:cNvPr id="12" name="">
             <a:extLst xmlns:a="http://schemas.openxmlformats.org/drawingml/2006/main">
               <a:ext uri="{FF2B5EF4-FFF2-40B4-BE49-F238E27FC236}">
-                <a16:creationId xmlns:a16="http://schemas.microsoft.com/office/drawing/2014/main" id="{E38D580B-AEC5-4822-B787-160F31506771}"/>
+                <a16:creationId xmlns:a16="http://schemas.microsoft.com/office/drawing/2014/main" id="{5DB2F0B9-8E2C-4C3C-9AA3-8CFE65BE8B31}"/>
               </a:ext>
             </a:extLst>
           </p:cNvPr>
@@ -1874,7 +1874,7 @@
           <p:cNvPr id="2" name="">
             <a:extLst xmlns:a="http://schemas.openxmlformats.org/drawingml/2006/main">
               <a:ext uri="{FF2B5EF4-FFF2-40B4-BE49-F238E27FC236}">
-                <a16:creationId xmlns:a16="http://schemas.microsoft.com/office/drawing/2014/main" id="{E6C99E42-76D1-4266-9589-D7D72059CC2C}"/>
+                <a16:creationId xmlns:a16="http://schemas.microsoft.com/office/drawing/2014/main" id="{B1DBE780-634B-4955-ADCC-1810E9D8BF1F}"/>
               </a:ext>
             </a:extLst>
           </p:cNvPr>
@@ -1931,7 +1931,7 @@
           <p:cNvPr id="3" name="">
             <a:extLst xmlns:a="http://schemas.openxmlformats.org/drawingml/2006/main">
               <a:ext uri="{FF2B5EF4-FFF2-40B4-BE49-F238E27FC236}">
-                <a16:creationId xmlns:a16="http://schemas.microsoft.com/office/drawing/2014/main" id="{EB4E62A7-6236-40B8-85A5-C75D588B8DDC}"/>
+                <a16:creationId xmlns:a16="http://schemas.microsoft.com/office/drawing/2014/main" id="{8731775B-4B2D-47E1-9AC9-72EC25EAF369}"/>
               </a:ext>
             </a:extLst>
           </p:cNvPr>
@@ -1965,7 +1965,7 @@
           <p:cNvPr id="4" name="">
             <a:extLst xmlns:a="http://schemas.openxmlformats.org/drawingml/2006/main">
               <a:ext uri="{FF2B5EF4-FFF2-40B4-BE49-F238E27FC236}">
-                <a16:creationId xmlns:a16="http://schemas.microsoft.com/office/drawing/2014/main" id="{D8175653-4AA1-43E5-BAF4-D16B24BA86F5}"/>
+                <a16:creationId xmlns:a16="http://schemas.microsoft.com/office/drawing/2014/main" id="{49C3F7BD-3CCF-4658-88A0-8680F4E15568}"/>
               </a:ext>
             </a:extLst>
           </p:cNvPr>
@@ -2022,7 +2022,7 @@
           <p:cNvPr id="5" name="">
             <a:extLst xmlns:a="http://schemas.openxmlformats.org/drawingml/2006/main">
               <a:ext uri="{FF2B5EF4-FFF2-40B4-BE49-F238E27FC236}">
-                <a16:creationId xmlns:a16="http://schemas.microsoft.com/office/drawing/2014/main" id="{62ABABCF-3356-462E-880D-2DBA3E81AEE5}"/>
+                <a16:creationId xmlns:a16="http://schemas.microsoft.com/office/drawing/2014/main" id="{C8931956-3799-4FE9-A5DC-17BA3793EE61}"/>
               </a:ext>
             </a:extLst>
           </p:cNvPr>
@@ -2079,7 +2079,7 @@
           <p:cNvPr id="6" name="">
             <a:extLst xmlns:a="http://schemas.openxmlformats.org/drawingml/2006/main">
               <a:ext uri="{FF2B5EF4-FFF2-40B4-BE49-F238E27FC236}">
-                <a16:creationId xmlns:a16="http://schemas.microsoft.com/office/drawing/2014/main" id="{DC0EF59A-4BB7-46FA-9068-485538E8C83B}"/>
+                <a16:creationId xmlns:a16="http://schemas.microsoft.com/office/drawing/2014/main" id="{7C406C01-7581-40A7-8D04-B228EB54851D}"/>
               </a:ext>
             </a:extLst>
           </p:cNvPr>
@@ -2113,7 +2113,7 @@
           <p:cNvPr id="7" name="">
             <a:extLst xmlns:a="http://schemas.openxmlformats.org/drawingml/2006/main">
               <a:ext uri="{FF2B5EF4-FFF2-40B4-BE49-F238E27FC236}">
-                <a16:creationId xmlns:a16="http://schemas.microsoft.com/office/drawing/2014/main" id="{9E5654A4-06AD-4314-9C4A-40A9521281D6}"/>
+                <a16:creationId xmlns:a16="http://schemas.microsoft.com/office/drawing/2014/main" id="{A3CEC7A6-3765-4E23-A5D6-935C944C1D78}"/>
               </a:ext>
             </a:extLst>
           </p:cNvPr>
@@ -2170,7 +2170,7 @@
           <p:cNvPr id="8" name="">
             <a:extLst xmlns:a="http://schemas.openxmlformats.org/drawingml/2006/main">
               <a:ext uri="{FF2B5EF4-FFF2-40B4-BE49-F238E27FC236}">
-                <a16:creationId xmlns:a16="http://schemas.microsoft.com/office/drawing/2014/main" id="{46116DB7-75CE-4573-AEBE-058832611106}"/>
+                <a16:creationId xmlns:a16="http://schemas.microsoft.com/office/drawing/2014/main" id="{FFF59FCC-D1D3-4DA8-9A1F-21E14313CC7A}"/>
               </a:ext>
             </a:extLst>
           </p:cNvPr>
@@ -2227,7 +2227,7 @@
           <p:cNvPr id="9" name="">
             <a:extLst xmlns:a="http://schemas.openxmlformats.org/drawingml/2006/main">
               <a:ext uri="{FF2B5EF4-FFF2-40B4-BE49-F238E27FC236}">
-                <a16:creationId xmlns:a16="http://schemas.microsoft.com/office/drawing/2014/main" id="{12BAC9C0-2EF1-428F-86AC-698318CF3684}"/>
+                <a16:creationId xmlns:a16="http://schemas.microsoft.com/office/drawing/2014/main" id="{EBC31F9D-7FEF-4362-9F8D-A7CCFCC1BD1C}"/>
               </a:ext>
             </a:extLst>
           </p:cNvPr>
@@ -2284,7 +2284,7 @@
           <p:cNvPr id="10" name="">
             <a:extLst xmlns:a="http://schemas.openxmlformats.org/drawingml/2006/main">
               <a:ext uri="{FF2B5EF4-FFF2-40B4-BE49-F238E27FC236}">
-                <a16:creationId xmlns:a16="http://schemas.microsoft.com/office/drawing/2014/main" id="{C52C566F-5390-4626-9025-25FF31DFC6C7}"/>
+                <a16:creationId xmlns:a16="http://schemas.microsoft.com/office/drawing/2014/main" id="{6D7F8120-FDCC-4C6F-AF57-B9DF27870E21}"/>
               </a:ext>
             </a:extLst>
           </p:cNvPr>
@@ -2341,7 +2341,7 @@
           <p:cNvPr id="11" name="">
             <a:extLst xmlns:a="http://schemas.openxmlformats.org/drawingml/2006/main">
               <a:ext uri="{FF2B5EF4-FFF2-40B4-BE49-F238E27FC236}">
-                <a16:creationId xmlns:a16="http://schemas.microsoft.com/office/drawing/2014/main" id="{451097AB-0F1E-4844-B1A8-E6A498169E76}"/>
+                <a16:creationId xmlns:a16="http://schemas.microsoft.com/office/drawing/2014/main" id="{9A5252F8-FA23-4DF6-B8CE-6763501B3E09}"/>
               </a:ext>
             </a:extLst>
           </p:cNvPr>
@@ -2396,7 +2396,7 @@
     </p:spTree>
     <p:extLst>
       <p:ext uri="{BB962C8B-B14F-4D97-AF65-F5344CB8AC3E}">
-        <p14:creationId xmlns:p14="http://schemas.microsoft.com/office/powerpoint/2010/main" val="1129418658"/>
+        <p14:creationId xmlns:p14="http://schemas.microsoft.com/office/powerpoint/2010/main" val="758831627"/>
       </p:ext>
     </p:extLst>
   </p:cSld>
@@ -2427,7 +2427,7 @@
           <p:cNvPr id="14" name="">
             <a:extLst xmlns:a="http://schemas.openxmlformats.org/drawingml/2006/main">
               <a:ext uri="{FF2B5EF4-FFF2-40B4-BE49-F238E27FC236}">
-                <a16:creationId xmlns:a16="http://schemas.microsoft.com/office/drawing/2014/main" id="{36B6A687-AE02-4013-9E29-272EB8D8FE58}"/>
+                <a16:creationId xmlns:a16="http://schemas.microsoft.com/office/drawing/2014/main" id="{918F1B5C-3986-40B9-957A-1778D9BF554F}"/>
               </a:ext>
             </a:extLst>
           </p:cNvPr>
@@ -2459,7 +2459,7 @@
           <p:cNvPr id="2" name="">
             <a:extLst xmlns:a="http://schemas.openxmlformats.org/drawingml/2006/main">
               <a:ext uri="{FF2B5EF4-FFF2-40B4-BE49-F238E27FC236}">
-                <a16:creationId xmlns:a16="http://schemas.microsoft.com/office/drawing/2014/main" id="{F5C7E609-6950-4388-A093-4D5053335692}"/>
+                <a16:creationId xmlns:a16="http://schemas.microsoft.com/office/drawing/2014/main" id="{45839D76-E029-4348-B376-CB5E29CDF256}"/>
               </a:ext>
             </a:extLst>
           </p:cNvPr>
@@ -2516,7 +2516,7 @@
           <p:cNvPr id="3" name="">
             <a:extLst xmlns:a="http://schemas.openxmlformats.org/drawingml/2006/main">
               <a:ext uri="{FF2B5EF4-FFF2-40B4-BE49-F238E27FC236}">
-                <a16:creationId xmlns:a16="http://schemas.microsoft.com/office/drawing/2014/main" id="{ADC22ED0-81D6-4C5B-BAB1-54CF7BA5245A}"/>
+                <a16:creationId xmlns:a16="http://schemas.microsoft.com/office/drawing/2014/main" id="{1FA3BA55-C893-4B17-9F80-2A39A55BB9F3}"/>
               </a:ext>
             </a:extLst>
           </p:cNvPr>
@@ -2548,7 +2548,7 @@
           <p:cNvPr id="4" name="">
             <a:extLst xmlns:a="http://schemas.openxmlformats.org/drawingml/2006/main">
               <a:ext uri="{FF2B5EF4-FFF2-40B4-BE49-F238E27FC236}">
-                <a16:creationId xmlns:a16="http://schemas.microsoft.com/office/drawing/2014/main" id="{32BCFE33-27F2-4407-996C-D78CD3831688}"/>
+                <a16:creationId xmlns:a16="http://schemas.microsoft.com/office/drawing/2014/main" id="{132BA960-56CA-411B-A541-6E56B4B4D9F4}"/>
               </a:ext>
             </a:extLst>
           </p:cNvPr>
@@ -2605,7 +2605,7 @@
           <p:cNvPr id="5" name="">
             <a:extLst xmlns:a="http://schemas.openxmlformats.org/drawingml/2006/main">
               <a:ext uri="{FF2B5EF4-FFF2-40B4-BE49-F238E27FC236}">
-                <a16:creationId xmlns:a16="http://schemas.microsoft.com/office/drawing/2014/main" id="{DB152C61-5EC2-4CD5-88AF-1998FE98C89B}"/>
+                <a16:creationId xmlns:a16="http://schemas.microsoft.com/office/drawing/2014/main" id="{0F3F0587-45D3-4CD5-9F08-C6FFDCCB0D1B}"/>
               </a:ext>
             </a:extLst>
           </p:cNvPr>
@@ -2662,7 +2662,7 @@
           <p:cNvPr id="6" name="">
             <a:extLst xmlns:a="http://schemas.openxmlformats.org/drawingml/2006/main">
               <a:ext uri="{FF2B5EF4-FFF2-40B4-BE49-F238E27FC236}">
-                <a16:creationId xmlns:a16="http://schemas.microsoft.com/office/drawing/2014/main" id="{7B1DD89D-E6F9-4CD9-A565-7FB06A8CEA81}"/>
+                <a16:creationId xmlns:a16="http://schemas.microsoft.com/office/drawing/2014/main" id="{1ECEFC4E-9F9F-4688-9CCA-E4C3338DF188}"/>
               </a:ext>
             </a:extLst>
           </p:cNvPr>
@@ -2719,7 +2719,7 @@
           <p:cNvPr id="7" name="">
             <a:extLst xmlns:a="http://schemas.openxmlformats.org/drawingml/2006/main">
               <a:ext uri="{FF2B5EF4-FFF2-40B4-BE49-F238E27FC236}">
-                <a16:creationId xmlns:a16="http://schemas.microsoft.com/office/drawing/2014/main" id="{FC7D1E57-3966-4FC8-A6CB-84F3F9E51D21}"/>
+                <a16:creationId xmlns:a16="http://schemas.microsoft.com/office/drawing/2014/main" id="{B23C46EB-F065-49B6-BC47-645089DDB747}"/>
               </a:ext>
             </a:extLst>
           </p:cNvPr>
@@ -2751,7 +2751,7 @@
           <p:cNvPr id="8" name="">
             <a:extLst xmlns:a="http://schemas.openxmlformats.org/drawingml/2006/main">
               <a:ext uri="{FF2B5EF4-FFF2-40B4-BE49-F238E27FC236}">
-                <a16:creationId xmlns:a16="http://schemas.microsoft.com/office/drawing/2014/main" id="{6C7C8EEB-295B-4B6F-A274-5ECECBE54F1D}"/>
+                <a16:creationId xmlns:a16="http://schemas.microsoft.com/office/drawing/2014/main" id="{662ED5A7-0A0D-444D-B655-4BD3144304E4}"/>
               </a:ext>
             </a:extLst>
           </p:cNvPr>
@@ -2808,7 +2808,7 @@
           <p:cNvPr id="9" name="">
             <a:extLst xmlns:a="http://schemas.openxmlformats.org/drawingml/2006/main">
               <a:ext uri="{FF2B5EF4-FFF2-40B4-BE49-F238E27FC236}">
-                <a16:creationId xmlns:a16="http://schemas.microsoft.com/office/drawing/2014/main" id="{F0F84719-1903-463B-9DB0-59008D777745}"/>
+                <a16:creationId xmlns:a16="http://schemas.microsoft.com/office/drawing/2014/main" id="{023E2A89-91C3-41E2-BF87-C161CA79BC40}"/>
               </a:ext>
             </a:extLst>
           </p:cNvPr>
@@ -2865,7 +2865,7 @@
           <p:cNvPr id="10" name="">
             <a:extLst xmlns:a="http://schemas.openxmlformats.org/drawingml/2006/main">
               <a:ext uri="{FF2B5EF4-FFF2-40B4-BE49-F238E27FC236}">
-                <a16:creationId xmlns:a16="http://schemas.microsoft.com/office/drawing/2014/main" id="{8FFCC9CF-7915-4113-8635-3AE372BE1CD6}"/>
+                <a16:creationId xmlns:a16="http://schemas.microsoft.com/office/drawing/2014/main" id="{48D38903-798D-4909-86BE-DB4F54BF544D}"/>
               </a:ext>
             </a:extLst>
           </p:cNvPr>
@@ -2922,7 +2922,7 @@
           <p:cNvPr id="11" name="">
             <a:extLst xmlns:a="http://schemas.openxmlformats.org/drawingml/2006/main">
               <a:ext uri="{FF2B5EF4-FFF2-40B4-BE49-F238E27FC236}">
-                <a16:creationId xmlns:a16="http://schemas.microsoft.com/office/drawing/2014/main" id="{C0B06C8A-E70D-4FB6-B177-FF1DD0A3390B}"/>
+                <a16:creationId xmlns:a16="http://schemas.microsoft.com/office/drawing/2014/main" id="{C9C66AF5-2154-458A-B7CF-976964C6FD4D}"/>
               </a:ext>
             </a:extLst>
           </p:cNvPr>
@@ -2979,7 +2979,7 @@
           <p:cNvPr id="12" name="">
             <a:extLst xmlns:a="http://schemas.openxmlformats.org/drawingml/2006/main">
               <a:ext uri="{FF2B5EF4-FFF2-40B4-BE49-F238E27FC236}">
-                <a16:creationId xmlns:a16="http://schemas.microsoft.com/office/drawing/2014/main" id="{2DE50145-00DC-47D1-96CC-E5FE04B692DF}"/>
+                <a16:creationId xmlns:a16="http://schemas.microsoft.com/office/drawing/2014/main" id="{DB4BFA51-94D1-436E-9A00-C2A6F65D81F9}"/>
               </a:ext>
             </a:extLst>
           </p:cNvPr>
@@ -3036,7 +3036,7 @@
           <p:cNvPr id="13" name="">
             <a:extLst xmlns:a="http://schemas.openxmlformats.org/drawingml/2006/main">
               <a:ext uri="{FF2B5EF4-FFF2-40B4-BE49-F238E27FC236}">
-                <a16:creationId xmlns:a16="http://schemas.microsoft.com/office/drawing/2014/main" id="{333F516D-5D7C-4892-96B9-438A32F574F6}"/>
+                <a16:creationId xmlns:a16="http://schemas.microsoft.com/office/drawing/2014/main" id="{1E6CA3B1-A6D0-46EF-9C10-E80D0152C48E}"/>
               </a:ext>
             </a:extLst>
           </p:cNvPr>
@@ -3091,7 +3091,7 @@
     </p:spTree>
     <p:extLst>
       <p:ext uri="{BB962C8B-B14F-4D97-AF65-F5344CB8AC3E}">
-        <p14:creationId xmlns:p14="http://schemas.microsoft.com/office/powerpoint/2010/main" val="1380854656"/>
+        <p14:creationId xmlns:p14="http://schemas.microsoft.com/office/powerpoint/2010/main" val="165535423"/>
       </p:ext>
     </p:extLst>
   </p:cSld>
@@ -3292,7 +3292,7 @@
           <p:cNvPr id="19" name="">
             <a:extLst xmlns:a="http://schemas.openxmlformats.org/drawingml/2006/main">
               <a:ext uri="{FF2B5EF4-FFF2-40B4-BE49-F238E27FC236}">
-                <a16:creationId xmlns:a16="http://schemas.microsoft.com/office/drawing/2014/main" id="{B0A46097-85FE-44A8-A354-3EC84BD27BB9}"/>
+                <a16:creationId xmlns:a16="http://schemas.microsoft.com/office/drawing/2014/main" id="{C31CEC6A-9803-4008-A43E-FD2FAF33FA5F}"/>
               </a:ext>
             </a:extLst>
           </p:cNvPr>
@@ -3324,7 +3324,7 @@
           <p:cNvPr id="2" name="">
             <a:extLst xmlns:a="http://schemas.openxmlformats.org/drawingml/2006/main">
               <a:ext uri="{FF2B5EF4-FFF2-40B4-BE49-F238E27FC236}">
-                <a16:creationId xmlns:a16="http://schemas.microsoft.com/office/drawing/2014/main" id="{84D7BC50-0E3A-4324-AF07-E785AB0E9EF8}"/>
+                <a16:creationId xmlns:a16="http://schemas.microsoft.com/office/drawing/2014/main" id="{5C366201-92EE-490F-9DED-2EF6637AE5CF}"/>
               </a:ext>
             </a:extLst>
           </p:cNvPr>
@@ -3381,7 +3381,7 @@
           <p:cNvPr id="3" name="">
             <a:extLst xmlns:a="http://schemas.openxmlformats.org/drawingml/2006/main">
               <a:ext uri="{FF2B5EF4-FFF2-40B4-BE49-F238E27FC236}">
-                <a16:creationId xmlns:a16="http://schemas.microsoft.com/office/drawing/2014/main" id="{5F5F13D8-8634-41C8-A7E5-8C66C28FAB1B}"/>
+                <a16:creationId xmlns:a16="http://schemas.microsoft.com/office/drawing/2014/main" id="{D3AA40C4-E484-4B5F-B612-1EC28C9D70AD}"/>
               </a:ext>
             </a:extLst>
           </p:cNvPr>
@@ -3413,7 +3413,7 @@
           <p:cNvPr id="4" name="">
             <a:extLst xmlns:a="http://schemas.openxmlformats.org/drawingml/2006/main">
               <a:ext uri="{FF2B5EF4-FFF2-40B4-BE49-F238E27FC236}">
-                <a16:creationId xmlns:a16="http://schemas.microsoft.com/office/drawing/2014/main" id="{FB021F3F-FF44-4051-A847-4E018F5C64D2}"/>
+                <a16:creationId xmlns:a16="http://schemas.microsoft.com/office/drawing/2014/main" id="{918814D3-103D-4A30-8A60-C505ABE19336}"/>
               </a:ext>
             </a:extLst>
           </p:cNvPr>
@@ -3470,7 +3470,7 @@
           <p:cNvPr id="5" name="">
             <a:extLst xmlns:a="http://schemas.openxmlformats.org/drawingml/2006/main">
               <a:ext uri="{FF2B5EF4-FFF2-40B4-BE49-F238E27FC236}">
-                <a16:creationId xmlns:a16="http://schemas.microsoft.com/office/drawing/2014/main" id="{809E50CB-6752-48E2-B2DD-7A7B44DFC6CA}"/>
+                <a16:creationId xmlns:a16="http://schemas.microsoft.com/office/drawing/2014/main" id="{F1A7B9BE-5E6B-4643-A96F-C5A9E07F926F}"/>
               </a:ext>
             </a:extLst>
           </p:cNvPr>
@@ -3527,7 +3527,7 @@
           <p:cNvPr id="6" name="">
             <a:extLst xmlns:a="http://schemas.openxmlformats.org/drawingml/2006/main">
               <a:ext uri="{FF2B5EF4-FFF2-40B4-BE49-F238E27FC236}">
-                <a16:creationId xmlns:a16="http://schemas.microsoft.com/office/drawing/2014/main" id="{4A566248-EBDA-45AC-8C3B-C93B9EC29C11}"/>
+                <a16:creationId xmlns:a16="http://schemas.microsoft.com/office/drawing/2014/main" id="{50B65700-5871-4B7D-A1CA-C4768D01100D}"/>
               </a:ext>
             </a:extLst>
           </p:cNvPr>
@@ -3584,7 +3584,7 @@
           <p:cNvPr id="7" name="">
             <a:extLst xmlns:a="http://schemas.openxmlformats.org/drawingml/2006/main">
               <a:ext uri="{FF2B5EF4-FFF2-40B4-BE49-F238E27FC236}">
-                <a16:creationId xmlns:a16="http://schemas.microsoft.com/office/drawing/2014/main" id="{7D19EFB5-A3B1-48D8-B993-DA98F7E3B274}"/>
+                <a16:creationId xmlns:a16="http://schemas.microsoft.com/office/drawing/2014/main" id="{493D79EC-941C-4F63-A30D-F86230682516}"/>
               </a:ext>
             </a:extLst>
           </p:cNvPr>
@@ -3616,7 +3616,7 @@
           <p:cNvPr id="8" name="">
             <a:extLst xmlns:a="http://schemas.openxmlformats.org/drawingml/2006/main">
               <a:ext uri="{FF2B5EF4-FFF2-40B4-BE49-F238E27FC236}">
-                <a16:creationId xmlns:a16="http://schemas.microsoft.com/office/drawing/2014/main" id="{ADEBBDEA-03F5-43CB-98CD-516B5FF7C8A8}"/>
+                <a16:creationId xmlns:a16="http://schemas.microsoft.com/office/drawing/2014/main" id="{221B08B5-2675-44B1-AF0C-1760EBEC9A82}"/>
               </a:ext>
             </a:extLst>
           </p:cNvPr>
@@ -3673,7 +3673,7 @@
           <p:cNvPr id="9" name="">
             <a:extLst xmlns:a="http://schemas.openxmlformats.org/drawingml/2006/main">
               <a:ext uri="{FF2B5EF4-FFF2-40B4-BE49-F238E27FC236}">
-                <a16:creationId xmlns:a16="http://schemas.microsoft.com/office/drawing/2014/main" id="{9DE11D7F-B5A8-4CDF-A8EC-9FFA54B165D1}"/>
+                <a16:creationId xmlns:a16="http://schemas.microsoft.com/office/drawing/2014/main" id="{ABA3FE98-6404-47EC-AFC2-3B7D74320951}"/>
               </a:ext>
             </a:extLst>
           </p:cNvPr>
@@ -3730,7 +3730,7 @@
           <p:cNvPr id="10" name="">
             <a:extLst xmlns:a="http://schemas.openxmlformats.org/drawingml/2006/main">
               <a:ext uri="{FF2B5EF4-FFF2-40B4-BE49-F238E27FC236}">
-                <a16:creationId xmlns:a16="http://schemas.microsoft.com/office/drawing/2014/main" id="{54E698A7-8C47-40A0-A663-957D837BEB80}"/>
+                <a16:creationId xmlns:a16="http://schemas.microsoft.com/office/drawing/2014/main" id="{49AEE284-EE43-4D5F-BBE6-D4304B4AFBF8}"/>
               </a:ext>
             </a:extLst>
           </p:cNvPr>
@@ -3787,7 +3787,7 @@
           <p:cNvPr id="11" name="">
             <a:extLst xmlns:a="http://schemas.openxmlformats.org/drawingml/2006/main">
               <a:ext uri="{FF2B5EF4-FFF2-40B4-BE49-F238E27FC236}">
-                <a16:creationId xmlns:a16="http://schemas.microsoft.com/office/drawing/2014/main" id="{D8A60B7C-65CA-4D55-9899-8274AB8C347E}"/>
+                <a16:creationId xmlns:a16="http://schemas.microsoft.com/office/drawing/2014/main" id="{39609004-3BD3-4F90-B3AF-00D501C39E85}"/>
               </a:ext>
             </a:extLst>
           </p:cNvPr>
@@ -3821,7 +3821,7 @@
           <p:cNvPr id="12" name="">
             <a:extLst xmlns:a="http://schemas.openxmlformats.org/drawingml/2006/main">
               <a:ext uri="{FF2B5EF4-FFF2-40B4-BE49-F238E27FC236}">
-                <a16:creationId xmlns:a16="http://schemas.microsoft.com/office/drawing/2014/main" id="{3AEB3B94-2DF7-4C81-94EA-14E88309B6CD}"/>
+                <a16:creationId xmlns:a16="http://schemas.microsoft.com/office/drawing/2014/main" id="{D1B6F899-3D88-4323-BB49-6B2F46714F42}"/>
               </a:ext>
             </a:extLst>
           </p:cNvPr>
@@ -3878,7 +3878,7 @@
           <p:cNvPr id="13" name="">
             <a:extLst xmlns:a="http://schemas.openxmlformats.org/drawingml/2006/main">
               <a:ext uri="{FF2B5EF4-FFF2-40B4-BE49-F238E27FC236}">
-                <a16:creationId xmlns:a16="http://schemas.microsoft.com/office/drawing/2014/main" id="{65966BBA-BFFF-49FC-A3B1-450628DDF541}"/>
+                <a16:creationId xmlns:a16="http://schemas.microsoft.com/office/drawing/2014/main" id="{6F9529B8-2240-439F-BB38-72D5D5AEF9EB}"/>
               </a:ext>
             </a:extLst>
           </p:cNvPr>
@@ -3935,7 +3935,7 @@
           <p:cNvPr id="14" name="">
             <a:extLst xmlns:a="http://schemas.openxmlformats.org/drawingml/2006/main">
               <a:ext uri="{FF2B5EF4-FFF2-40B4-BE49-F238E27FC236}">
-                <a16:creationId xmlns:a16="http://schemas.microsoft.com/office/drawing/2014/main" id="{86DA7E71-EC21-4E6B-9D88-875F54DF764E}"/>
+                <a16:creationId xmlns:a16="http://schemas.microsoft.com/office/drawing/2014/main" id="{02A87D6A-6F1D-4104-B252-E20797A28A56}"/>
               </a:ext>
             </a:extLst>
           </p:cNvPr>
@@ -3992,7 +3992,7 @@
           <p:cNvPr id="15" name="">
             <a:extLst xmlns:a="http://schemas.openxmlformats.org/drawingml/2006/main">
               <a:ext uri="{FF2B5EF4-FFF2-40B4-BE49-F238E27FC236}">
-                <a16:creationId xmlns:a16="http://schemas.microsoft.com/office/drawing/2014/main" id="{2EF39A5B-EA15-4BF0-8845-0EA1F321F39F}"/>
+                <a16:creationId xmlns:a16="http://schemas.microsoft.com/office/drawing/2014/main" id="{573B79F9-F9EA-46EF-9C5F-0CC58AFE5587}"/>
               </a:ext>
             </a:extLst>
           </p:cNvPr>
@@ -4026,7 +4026,7 @@
           <p:cNvPr id="16" name="">
             <a:extLst xmlns:a="http://schemas.openxmlformats.org/drawingml/2006/main">
               <a:ext uri="{FF2B5EF4-FFF2-40B4-BE49-F238E27FC236}">
-                <a16:creationId xmlns:a16="http://schemas.microsoft.com/office/drawing/2014/main" id="{61F9D60F-5B5A-404C-BAF5-E20A8B5CC3B4}"/>
+                <a16:creationId xmlns:a16="http://schemas.microsoft.com/office/drawing/2014/main" id="{99B3287F-68F3-4C9B-843B-667372913DBD}"/>
               </a:ext>
             </a:extLst>
           </p:cNvPr>
@@ -4083,7 +4083,7 @@
           <p:cNvPr id="17" name="">
             <a:extLst xmlns:a="http://schemas.openxmlformats.org/drawingml/2006/main">
               <a:ext uri="{FF2B5EF4-FFF2-40B4-BE49-F238E27FC236}">
-                <a16:creationId xmlns:a16="http://schemas.microsoft.com/office/drawing/2014/main" id="{E3BEF239-D5B9-46A1-8423-0A1436C5BE3A}"/>
+                <a16:creationId xmlns:a16="http://schemas.microsoft.com/office/drawing/2014/main" id="{2DA801F8-561D-4EF4-909F-CB387786B4D5}"/>
               </a:ext>
             </a:extLst>
           </p:cNvPr>
@@ -4140,7 +4140,7 @@
           <p:cNvPr id="18" name="">
             <a:extLst xmlns:a="http://schemas.openxmlformats.org/drawingml/2006/main">
               <a:ext uri="{FF2B5EF4-FFF2-40B4-BE49-F238E27FC236}">
-                <a16:creationId xmlns:a16="http://schemas.microsoft.com/office/drawing/2014/main" id="{3FB70B7C-0CA1-4FB5-8BBA-3C8014E67EBB}"/>
+                <a16:creationId xmlns:a16="http://schemas.microsoft.com/office/drawing/2014/main" id="{6522147B-9AB2-4475-8E68-2343B7295612}"/>
               </a:ext>
             </a:extLst>
           </p:cNvPr>
@@ -4195,7 +4195,7 @@
     </p:spTree>
     <p:extLst>
       <p:ext uri="{BB962C8B-B14F-4D97-AF65-F5344CB8AC3E}">
-        <p14:creationId xmlns:p14="http://schemas.microsoft.com/office/powerpoint/2010/main" val="1248386317"/>
+        <p14:creationId xmlns:p14="http://schemas.microsoft.com/office/powerpoint/2010/main" val="73651335"/>
       </p:ext>
     </p:extLst>
   </p:cSld>
@@ -4350,7 +4350,7 @@
           <p:cNvPr id="23" name="">
             <a:extLst xmlns:a="http://schemas.openxmlformats.org/drawingml/2006/main">
               <a:ext uri="{FF2B5EF4-FFF2-40B4-BE49-F238E27FC236}">
-                <a16:creationId xmlns:a16="http://schemas.microsoft.com/office/drawing/2014/main" id="{5AFAF288-1827-468C-BE70-D99BA5F9753C}"/>
+                <a16:creationId xmlns:a16="http://schemas.microsoft.com/office/drawing/2014/main" id="{EEB586A2-38DC-4113-976C-84B7DA224B1F}"/>
               </a:ext>
             </a:extLst>
           </p:cNvPr>
@@ -4382,7 +4382,7 @@
           <p:cNvPr id="2" name="">
             <a:extLst xmlns:a="http://schemas.openxmlformats.org/drawingml/2006/main">
               <a:ext uri="{FF2B5EF4-FFF2-40B4-BE49-F238E27FC236}">
-                <a16:creationId xmlns:a16="http://schemas.microsoft.com/office/drawing/2014/main" id="{F99A1B74-3413-433F-97AA-FF6347417507}"/>
+                <a16:creationId xmlns:a16="http://schemas.microsoft.com/office/drawing/2014/main" id="{812A6D86-43BA-4D0C-863E-82AD298713E2}"/>
               </a:ext>
             </a:extLst>
           </p:cNvPr>
@@ -4439,7 +4439,7 @@
           <p:cNvPr id="3" name="">
             <a:extLst xmlns:a="http://schemas.openxmlformats.org/drawingml/2006/main">
               <a:ext uri="{FF2B5EF4-FFF2-40B4-BE49-F238E27FC236}">
-                <a16:creationId xmlns:a16="http://schemas.microsoft.com/office/drawing/2014/main" id="{E9CEE16A-4C5E-4678-BBDA-699EA05F5E40}"/>
+                <a16:creationId xmlns:a16="http://schemas.microsoft.com/office/drawing/2014/main" id="{800657CC-0185-4951-ADDE-0359AD3230C4}"/>
               </a:ext>
             </a:extLst>
           </p:cNvPr>
@@ -4471,7 +4471,7 @@
           <p:cNvPr id="4" name="">
             <a:extLst xmlns:a="http://schemas.openxmlformats.org/drawingml/2006/main">
               <a:ext uri="{FF2B5EF4-FFF2-40B4-BE49-F238E27FC236}">
-                <a16:creationId xmlns:a16="http://schemas.microsoft.com/office/drawing/2014/main" id="{25000EEF-9AF6-4A2F-AF4B-6F01EF2BFFDF}"/>
+                <a16:creationId xmlns:a16="http://schemas.microsoft.com/office/drawing/2014/main" id="{62836260-8D5F-4808-9456-C0BE619047C9}"/>
               </a:ext>
             </a:extLst>
           </p:cNvPr>
@@ -4528,7 +4528,7 @@
           <p:cNvPr id="5" name="">
             <a:extLst xmlns:a="http://schemas.openxmlformats.org/drawingml/2006/main">
               <a:ext uri="{FF2B5EF4-FFF2-40B4-BE49-F238E27FC236}">
-                <a16:creationId xmlns:a16="http://schemas.microsoft.com/office/drawing/2014/main" id="{AC133DEE-9D10-46BD-B7EB-BBF11BDF7199}"/>
+                <a16:creationId xmlns:a16="http://schemas.microsoft.com/office/drawing/2014/main" id="{04C1765D-8E87-4F2B-B8E4-DA49593E2D4C}"/>
               </a:ext>
             </a:extLst>
           </p:cNvPr>
@@ -4585,7 +4585,7 @@
           <p:cNvPr id="6" name="">
             <a:extLst xmlns:a="http://schemas.openxmlformats.org/drawingml/2006/main">
               <a:ext uri="{FF2B5EF4-FFF2-40B4-BE49-F238E27FC236}">
-                <a16:creationId xmlns:a16="http://schemas.microsoft.com/office/drawing/2014/main" id="{1E2FACF7-D8C3-438E-9D0B-DA19D1AE1B94}"/>
+                <a16:creationId xmlns:a16="http://schemas.microsoft.com/office/drawing/2014/main" id="{9E83D79A-2A25-4147-9E0D-AD3CD9EDE639}"/>
               </a:ext>
             </a:extLst>
           </p:cNvPr>
@@ -4642,7 +4642,7 @@
           <p:cNvPr id="7" name="">
             <a:extLst xmlns:a="http://schemas.openxmlformats.org/drawingml/2006/main">
               <a:ext uri="{FF2B5EF4-FFF2-40B4-BE49-F238E27FC236}">
-                <a16:creationId xmlns:a16="http://schemas.microsoft.com/office/drawing/2014/main" id="{DAD13AD7-5689-4B61-932F-91AF97ADE56B}"/>
+                <a16:creationId xmlns:a16="http://schemas.microsoft.com/office/drawing/2014/main" id="{0A503373-A6BE-4656-94BB-1394C334D1E1}"/>
               </a:ext>
             </a:extLst>
           </p:cNvPr>
@@ -4674,7 +4674,7 @@
           <p:cNvPr id="8" name="">
             <a:extLst xmlns:a="http://schemas.openxmlformats.org/drawingml/2006/main">
               <a:ext uri="{FF2B5EF4-FFF2-40B4-BE49-F238E27FC236}">
-                <a16:creationId xmlns:a16="http://schemas.microsoft.com/office/drawing/2014/main" id="{5AE01BE4-E90B-4BA8-BA80-57494D738E1B}"/>
+                <a16:creationId xmlns:a16="http://schemas.microsoft.com/office/drawing/2014/main" id="{811C3F17-9346-49A0-9FA5-D8A406C5439D}"/>
               </a:ext>
             </a:extLst>
           </p:cNvPr>
@@ -4731,7 +4731,7 @@
           <p:cNvPr id="9" name="">
             <a:extLst xmlns:a="http://schemas.openxmlformats.org/drawingml/2006/main">
               <a:ext uri="{FF2B5EF4-FFF2-40B4-BE49-F238E27FC236}">
-                <a16:creationId xmlns:a16="http://schemas.microsoft.com/office/drawing/2014/main" id="{FAF9EF28-B2CF-4CC2-9E0F-BE37E4A3CDD4}"/>
+                <a16:creationId xmlns:a16="http://schemas.microsoft.com/office/drawing/2014/main" id="{90B08126-AF5D-4849-A1C9-FC14BB74676B}"/>
               </a:ext>
             </a:extLst>
           </p:cNvPr>
@@ -4788,7 +4788,7 @@
           <p:cNvPr id="10" name="">
             <a:extLst xmlns:a="http://schemas.openxmlformats.org/drawingml/2006/main">
               <a:ext uri="{FF2B5EF4-FFF2-40B4-BE49-F238E27FC236}">
-                <a16:creationId xmlns:a16="http://schemas.microsoft.com/office/drawing/2014/main" id="{BED1EBC7-872B-4513-B1EC-481CAA2CC7ED}"/>
+                <a16:creationId xmlns:a16="http://schemas.microsoft.com/office/drawing/2014/main" id="{7739B566-87C3-4665-979E-455B651E4CCD}"/>
               </a:ext>
             </a:extLst>
           </p:cNvPr>
@@ -4822,7 +4822,7 @@
           <p:cNvPr id="11" name="">
             <a:extLst xmlns:a="http://schemas.openxmlformats.org/drawingml/2006/main">
               <a:ext uri="{FF2B5EF4-FFF2-40B4-BE49-F238E27FC236}">
-                <a16:creationId xmlns:a16="http://schemas.microsoft.com/office/drawing/2014/main" id="{12FD65DF-0850-4F44-B331-9B1283FB1070}"/>
+                <a16:creationId xmlns:a16="http://schemas.microsoft.com/office/drawing/2014/main" id="{5EB6F881-9CF3-43D8-AD00-02A34937C40F}"/>
               </a:ext>
             </a:extLst>
           </p:cNvPr>
@@ -4854,7 +4854,7 @@
           <p:cNvPr id="12" name="">
             <a:extLst xmlns:a="http://schemas.openxmlformats.org/drawingml/2006/main">
               <a:ext uri="{FF2B5EF4-FFF2-40B4-BE49-F238E27FC236}">
-                <a16:creationId xmlns:a16="http://schemas.microsoft.com/office/drawing/2014/main" id="{62DD6EE4-F364-4CC9-A9DD-59BE6A6CD0A5}"/>
+                <a16:creationId xmlns:a16="http://schemas.microsoft.com/office/drawing/2014/main" id="{52532A99-63FA-493C-987F-DD4A58F51685}"/>
               </a:ext>
             </a:extLst>
           </p:cNvPr>
@@ -4911,7 +4911,7 @@
           <p:cNvPr id="13" name="">
             <a:extLst xmlns:a="http://schemas.openxmlformats.org/drawingml/2006/main">
               <a:ext uri="{FF2B5EF4-FFF2-40B4-BE49-F238E27FC236}">
-                <a16:creationId xmlns:a16="http://schemas.microsoft.com/office/drawing/2014/main" id="{34D2DD4B-3225-407B-9884-CE6EEB799B6E}"/>
+                <a16:creationId xmlns:a16="http://schemas.microsoft.com/office/drawing/2014/main" id="{82CC4F0E-92D8-4E94-9314-30147C6C56D6}"/>
               </a:ext>
             </a:extLst>
           </p:cNvPr>
@@ -4968,7 +4968,7 @@
           <p:cNvPr id="14" name="">
             <a:extLst xmlns:a="http://schemas.openxmlformats.org/drawingml/2006/main">
               <a:ext uri="{FF2B5EF4-FFF2-40B4-BE49-F238E27FC236}">
-                <a16:creationId xmlns:a16="http://schemas.microsoft.com/office/drawing/2014/main" id="{BF93950C-BF32-44DA-92AA-5A0FAD65C7F6}"/>
+                <a16:creationId xmlns:a16="http://schemas.microsoft.com/office/drawing/2014/main" id="{19D62D0D-DBAE-4548-AB8F-E7130EDF4478}"/>
               </a:ext>
             </a:extLst>
           </p:cNvPr>
@@ -5002,7 +5002,7 @@
           <p:cNvPr id="15" name="">
             <a:extLst xmlns:a="http://schemas.openxmlformats.org/drawingml/2006/main">
               <a:ext uri="{FF2B5EF4-FFF2-40B4-BE49-F238E27FC236}">
-                <a16:creationId xmlns:a16="http://schemas.microsoft.com/office/drawing/2014/main" id="{780799F0-1632-4A26-8216-D163DD157900}"/>
+                <a16:creationId xmlns:a16="http://schemas.microsoft.com/office/drawing/2014/main" id="{F52400F7-6CC9-4310-857B-B2B41BD6B1F3}"/>
               </a:ext>
             </a:extLst>
           </p:cNvPr>
@@ -5034,7 +5034,7 @@
           <p:cNvPr id="16" name="">
             <a:extLst xmlns:a="http://schemas.openxmlformats.org/drawingml/2006/main">
               <a:ext uri="{FF2B5EF4-FFF2-40B4-BE49-F238E27FC236}">
-                <a16:creationId xmlns:a16="http://schemas.microsoft.com/office/drawing/2014/main" id="{1DBF8BCF-66E8-4DE4-B6A1-AB4AE29F1A2F}"/>
+                <a16:creationId xmlns:a16="http://schemas.microsoft.com/office/drawing/2014/main" id="{33B18846-ED74-4894-9385-99116C4425D2}"/>
               </a:ext>
             </a:extLst>
           </p:cNvPr>
@@ -5091,7 +5091,7 @@
           <p:cNvPr id="17" name="">
             <a:extLst xmlns:a="http://schemas.openxmlformats.org/drawingml/2006/main">
               <a:ext uri="{FF2B5EF4-FFF2-40B4-BE49-F238E27FC236}">
-                <a16:creationId xmlns:a16="http://schemas.microsoft.com/office/drawing/2014/main" id="{237F4311-E89E-4946-AFFC-43762F435D84}"/>
+                <a16:creationId xmlns:a16="http://schemas.microsoft.com/office/drawing/2014/main" id="{B317C7C5-05BE-45F2-ABE4-E09181620EBD}"/>
               </a:ext>
             </a:extLst>
           </p:cNvPr>
@@ -5148,7 +5148,7 @@
           <p:cNvPr id="18" name="">
             <a:extLst xmlns:a="http://schemas.openxmlformats.org/drawingml/2006/main">
               <a:ext uri="{FF2B5EF4-FFF2-40B4-BE49-F238E27FC236}">
-                <a16:creationId xmlns:a16="http://schemas.microsoft.com/office/drawing/2014/main" id="{6F2EB833-D448-4286-9F8C-E341530DD50D}"/>
+                <a16:creationId xmlns:a16="http://schemas.microsoft.com/office/drawing/2014/main" id="{92842198-3A8E-4BE8-8281-92A898411251}"/>
               </a:ext>
             </a:extLst>
           </p:cNvPr>
@@ -5182,7 +5182,7 @@
           <p:cNvPr id="19" name="">
             <a:extLst xmlns:a="http://schemas.openxmlformats.org/drawingml/2006/main">
               <a:ext uri="{FF2B5EF4-FFF2-40B4-BE49-F238E27FC236}">
-                <a16:creationId xmlns:a16="http://schemas.microsoft.com/office/drawing/2014/main" id="{D48C4231-52B2-4614-869B-F2C035264F07}"/>
+                <a16:creationId xmlns:a16="http://schemas.microsoft.com/office/drawing/2014/main" id="{C8CD15D2-4807-4565-B0E2-C9BE613DF013}"/>
               </a:ext>
             </a:extLst>
           </p:cNvPr>
@@ -5214,7 +5214,7 @@
           <p:cNvPr id="20" name="">
             <a:extLst xmlns:a="http://schemas.openxmlformats.org/drawingml/2006/main">
               <a:ext uri="{FF2B5EF4-FFF2-40B4-BE49-F238E27FC236}">
-                <a16:creationId xmlns:a16="http://schemas.microsoft.com/office/drawing/2014/main" id="{8F785E12-264F-4D1A-AA5A-3B5D716440A1}"/>
+                <a16:creationId xmlns:a16="http://schemas.microsoft.com/office/drawing/2014/main" id="{538C8721-56B7-4C05-9BA4-9868C1CF6A77}"/>
               </a:ext>
             </a:extLst>
           </p:cNvPr>
@@ -5271,7 +5271,7 @@
           <p:cNvPr id="21" name="">
             <a:extLst xmlns:a="http://schemas.openxmlformats.org/drawingml/2006/main">
               <a:ext uri="{FF2B5EF4-FFF2-40B4-BE49-F238E27FC236}">
-                <a16:creationId xmlns:a16="http://schemas.microsoft.com/office/drawing/2014/main" id="{2BC4254D-579A-4C4D-BDBC-FC29FEA60C49}"/>
+                <a16:creationId xmlns:a16="http://schemas.microsoft.com/office/drawing/2014/main" id="{B23245DA-FB63-4806-8AA2-7BAB54E257C6}"/>
               </a:ext>
             </a:extLst>
           </p:cNvPr>
@@ -5328,7 +5328,7 @@
           <p:cNvPr id="22" name="">
             <a:extLst xmlns:a="http://schemas.openxmlformats.org/drawingml/2006/main">
               <a:ext uri="{FF2B5EF4-FFF2-40B4-BE49-F238E27FC236}">
-                <a16:creationId xmlns:a16="http://schemas.microsoft.com/office/drawing/2014/main" id="{F6A16E26-53EA-40C4-AC1B-1BE5E2716419}"/>
+                <a16:creationId xmlns:a16="http://schemas.microsoft.com/office/drawing/2014/main" id="{185731C9-E1CC-4635-8872-F4DFEDE0F016}"/>
               </a:ext>
             </a:extLst>
           </p:cNvPr>
@@ -5383,7 +5383,7 @@
     </p:spTree>
     <p:extLst>
       <p:ext uri="{BB962C8B-B14F-4D97-AF65-F5344CB8AC3E}">
-        <p14:creationId xmlns:p14="http://schemas.microsoft.com/office/powerpoint/2010/main" val="1361262225"/>
+        <p14:creationId xmlns:p14="http://schemas.microsoft.com/office/powerpoint/2010/main" val="1878181059"/>
       </p:ext>
     </p:extLst>
   </p:cSld>
@@ -5584,7 +5584,7 @@
           <p:cNvPr id="23" name="">
             <a:extLst xmlns:a="http://schemas.openxmlformats.org/drawingml/2006/main">
               <a:ext uri="{FF2B5EF4-FFF2-40B4-BE49-F238E27FC236}">
-                <a16:creationId xmlns:a16="http://schemas.microsoft.com/office/drawing/2014/main" id="{7A95E5A8-BF53-490B-A4DE-E952FF68B17D}"/>
+                <a16:creationId xmlns:a16="http://schemas.microsoft.com/office/drawing/2014/main" id="{30910015-D4A5-428A-BE16-63BEBAFA1514}"/>
               </a:ext>
             </a:extLst>
           </p:cNvPr>
@@ -5616,7 +5616,7 @@
           <p:cNvPr id="2" name="">
             <a:extLst xmlns:a="http://schemas.openxmlformats.org/drawingml/2006/main">
               <a:ext uri="{FF2B5EF4-FFF2-40B4-BE49-F238E27FC236}">
-                <a16:creationId xmlns:a16="http://schemas.microsoft.com/office/drawing/2014/main" id="{F31B8678-9F43-435F-BF28-1EF2FF028760}"/>
+                <a16:creationId xmlns:a16="http://schemas.microsoft.com/office/drawing/2014/main" id="{BB375736-FE1E-4852-BC00-6B27924DF7DE}"/>
               </a:ext>
             </a:extLst>
           </p:cNvPr>
@@ -5673,7 +5673,7 @@
           <p:cNvPr id="3" name="">
             <a:extLst xmlns:a="http://schemas.openxmlformats.org/drawingml/2006/main">
               <a:ext uri="{FF2B5EF4-FFF2-40B4-BE49-F238E27FC236}">
-                <a16:creationId xmlns:a16="http://schemas.microsoft.com/office/drawing/2014/main" id="{12877387-B1EC-4B15-A7F6-1ECCD1B3B3EA}"/>
+                <a16:creationId xmlns:a16="http://schemas.microsoft.com/office/drawing/2014/main" id="{B9374787-5FA2-4B33-BEF3-6CA1B3FC00A8}"/>
               </a:ext>
             </a:extLst>
           </p:cNvPr>
@@ -5705,7 +5705,7 @@
           <p:cNvPr id="4" name="">
             <a:extLst xmlns:a="http://schemas.openxmlformats.org/drawingml/2006/main">
               <a:ext uri="{FF2B5EF4-FFF2-40B4-BE49-F238E27FC236}">
-                <a16:creationId xmlns:a16="http://schemas.microsoft.com/office/drawing/2014/main" id="{549D1E8D-D376-4FB5-895E-A77A3F007EB8}"/>
+                <a16:creationId xmlns:a16="http://schemas.microsoft.com/office/drawing/2014/main" id="{4F3C898D-5C01-4149-9448-419FF8DBC463}"/>
               </a:ext>
             </a:extLst>
           </p:cNvPr>
@@ -5762,7 +5762,7 @@
           <p:cNvPr id="5" name="">
             <a:extLst xmlns:a="http://schemas.openxmlformats.org/drawingml/2006/main">
               <a:ext uri="{FF2B5EF4-FFF2-40B4-BE49-F238E27FC236}">
-                <a16:creationId xmlns:a16="http://schemas.microsoft.com/office/drawing/2014/main" id="{ABC72C26-037E-4044-B6EB-9A58E614947F}"/>
+                <a16:creationId xmlns:a16="http://schemas.microsoft.com/office/drawing/2014/main" id="{21936581-E12A-411B-B8A6-494B21E5158B}"/>
               </a:ext>
             </a:extLst>
           </p:cNvPr>
@@ -5819,7 +5819,7 @@
           <p:cNvPr id="6" name="">
             <a:extLst xmlns:a="http://schemas.openxmlformats.org/drawingml/2006/main">
               <a:ext uri="{FF2B5EF4-FFF2-40B4-BE49-F238E27FC236}">
-                <a16:creationId xmlns:a16="http://schemas.microsoft.com/office/drawing/2014/main" id="{32E79408-032A-476C-962D-C4642DEBC7F6}"/>
+                <a16:creationId xmlns:a16="http://schemas.microsoft.com/office/drawing/2014/main" id="{BFEE06D1-4094-42C4-B8E3-A12FAA451A42}"/>
               </a:ext>
             </a:extLst>
           </p:cNvPr>
@@ -5876,7 +5876,7 @@
           <p:cNvPr id="7" name="">
             <a:extLst xmlns:a="http://schemas.openxmlformats.org/drawingml/2006/main">
               <a:ext uri="{FF2B5EF4-FFF2-40B4-BE49-F238E27FC236}">
-                <a16:creationId xmlns:a16="http://schemas.microsoft.com/office/drawing/2014/main" id="{D12A97FE-438A-40C7-9269-BB707445C34C}"/>
+                <a16:creationId xmlns:a16="http://schemas.microsoft.com/office/drawing/2014/main" id="{E9F73688-0333-447D-8065-9C8E5A853E6B}"/>
               </a:ext>
             </a:extLst>
           </p:cNvPr>
@@ -5908,7 +5908,7 @@
           <p:cNvPr id="8" name="">
             <a:extLst xmlns:a="http://schemas.openxmlformats.org/drawingml/2006/main">
               <a:ext uri="{FF2B5EF4-FFF2-40B4-BE49-F238E27FC236}">
-                <a16:creationId xmlns:a16="http://schemas.microsoft.com/office/drawing/2014/main" id="{AEFE3A55-E754-4E71-B955-C6B8046E0D23}"/>
+                <a16:creationId xmlns:a16="http://schemas.microsoft.com/office/drawing/2014/main" id="{8B2FCAF1-4EBF-4701-B95F-D47A7E4EE7BB}"/>
               </a:ext>
             </a:extLst>
           </p:cNvPr>
@@ -5965,7 +5965,7 @@
           <p:cNvPr id="9" name="">
             <a:extLst xmlns:a="http://schemas.openxmlformats.org/drawingml/2006/main">
               <a:ext uri="{FF2B5EF4-FFF2-40B4-BE49-F238E27FC236}">
-                <a16:creationId xmlns:a16="http://schemas.microsoft.com/office/drawing/2014/main" id="{A795EC00-E5BF-46AC-A2E2-54380639CAA5}"/>
+                <a16:creationId xmlns:a16="http://schemas.microsoft.com/office/drawing/2014/main" id="{F4722CF3-2856-4DA6-B75B-E71CDD3B1040}"/>
               </a:ext>
             </a:extLst>
           </p:cNvPr>
@@ -6022,7 +6022,7 @@
           <p:cNvPr id="10" name="">
             <a:extLst xmlns:a="http://schemas.openxmlformats.org/drawingml/2006/main">
               <a:ext uri="{FF2B5EF4-FFF2-40B4-BE49-F238E27FC236}">
-                <a16:creationId xmlns:a16="http://schemas.microsoft.com/office/drawing/2014/main" id="{288F22DA-583A-423B-923E-C17B7824B03D}"/>
+                <a16:creationId xmlns:a16="http://schemas.microsoft.com/office/drawing/2014/main" id="{B50E0C1B-1C50-4C2E-B68A-4EC7501228EC}"/>
               </a:ext>
             </a:extLst>
           </p:cNvPr>
@@ -6056,7 +6056,7 @@
           <p:cNvPr id="11" name="">
             <a:extLst xmlns:a="http://schemas.openxmlformats.org/drawingml/2006/main">
               <a:ext uri="{FF2B5EF4-FFF2-40B4-BE49-F238E27FC236}">
-                <a16:creationId xmlns:a16="http://schemas.microsoft.com/office/drawing/2014/main" id="{B96799C4-9D61-4EF0-8093-95212F6778B6}"/>
+                <a16:creationId xmlns:a16="http://schemas.microsoft.com/office/drawing/2014/main" id="{C49BE70E-670F-4DA2-9821-8A1D8D911C71}"/>
               </a:ext>
             </a:extLst>
           </p:cNvPr>
@@ -6088,7 +6088,7 @@
           <p:cNvPr id="12" name="">
             <a:extLst xmlns:a="http://schemas.openxmlformats.org/drawingml/2006/main">
               <a:ext uri="{FF2B5EF4-FFF2-40B4-BE49-F238E27FC236}">
-                <a16:creationId xmlns:a16="http://schemas.microsoft.com/office/drawing/2014/main" id="{129E66E3-349C-43E0-8083-F27128786BA7}"/>
+                <a16:creationId xmlns:a16="http://schemas.microsoft.com/office/drawing/2014/main" id="{4335EE2B-18C3-40AB-81C6-64EC1F33C313}"/>
               </a:ext>
             </a:extLst>
           </p:cNvPr>
@@ -6145,7 +6145,7 @@
           <p:cNvPr id="13" name="">
             <a:extLst xmlns:a="http://schemas.openxmlformats.org/drawingml/2006/main">
               <a:ext uri="{FF2B5EF4-FFF2-40B4-BE49-F238E27FC236}">
-                <a16:creationId xmlns:a16="http://schemas.microsoft.com/office/drawing/2014/main" id="{B2E36AFC-D631-483C-BFEC-DB6AE9687655}"/>
+                <a16:creationId xmlns:a16="http://schemas.microsoft.com/office/drawing/2014/main" id="{6D9056A1-C1A5-4859-A337-B4B490C3DE5A}"/>
               </a:ext>
             </a:extLst>
           </p:cNvPr>
@@ -6202,7 +6202,7 @@
           <p:cNvPr id="14" name="">
             <a:extLst xmlns:a="http://schemas.openxmlformats.org/drawingml/2006/main">
               <a:ext uri="{FF2B5EF4-FFF2-40B4-BE49-F238E27FC236}">
-                <a16:creationId xmlns:a16="http://schemas.microsoft.com/office/drawing/2014/main" id="{BA09BDD7-47C7-44A9-A5FF-A188B17697FD}"/>
+                <a16:creationId xmlns:a16="http://schemas.microsoft.com/office/drawing/2014/main" id="{F52AB495-C786-4F63-8CA5-8233AFB5CBAB}"/>
               </a:ext>
             </a:extLst>
           </p:cNvPr>
@@ -6236,7 +6236,7 @@
           <p:cNvPr id="15" name="">
             <a:extLst xmlns:a="http://schemas.openxmlformats.org/drawingml/2006/main">
               <a:ext uri="{FF2B5EF4-FFF2-40B4-BE49-F238E27FC236}">
-                <a16:creationId xmlns:a16="http://schemas.microsoft.com/office/drawing/2014/main" id="{E9C3AFB4-AA9E-4983-8DF4-71C3FDF467C9}"/>
+                <a16:creationId xmlns:a16="http://schemas.microsoft.com/office/drawing/2014/main" id="{1F3BE21E-C045-486C-BDB4-5C16DCA232D5}"/>
               </a:ext>
             </a:extLst>
           </p:cNvPr>
@@ -6268,7 +6268,7 @@
           <p:cNvPr id="16" name="">
             <a:extLst xmlns:a="http://schemas.openxmlformats.org/drawingml/2006/main">
               <a:ext uri="{FF2B5EF4-FFF2-40B4-BE49-F238E27FC236}">
-                <a16:creationId xmlns:a16="http://schemas.microsoft.com/office/drawing/2014/main" id="{40DAF669-B5BF-45A3-86D2-2FDCFE1B6F18}"/>
+                <a16:creationId xmlns:a16="http://schemas.microsoft.com/office/drawing/2014/main" id="{EA6C2662-48D2-434B-9DF5-D7441D677CB4}"/>
               </a:ext>
             </a:extLst>
           </p:cNvPr>
@@ -6325,7 +6325,7 @@
           <p:cNvPr id="17" name="">
             <a:extLst xmlns:a="http://schemas.openxmlformats.org/drawingml/2006/main">
               <a:ext uri="{FF2B5EF4-FFF2-40B4-BE49-F238E27FC236}">
-                <a16:creationId xmlns:a16="http://schemas.microsoft.com/office/drawing/2014/main" id="{D3F878D3-22B1-4D62-A9D8-2DA51B272C32}"/>
+                <a16:creationId xmlns:a16="http://schemas.microsoft.com/office/drawing/2014/main" id="{A4EC087D-DBE9-4E85-B8F4-8017FBADCD95}"/>
               </a:ext>
             </a:extLst>
           </p:cNvPr>
@@ -6382,7 +6382,7 @@
           <p:cNvPr id="18" name="">
             <a:extLst xmlns:a="http://schemas.openxmlformats.org/drawingml/2006/main">
               <a:ext uri="{FF2B5EF4-FFF2-40B4-BE49-F238E27FC236}">
-                <a16:creationId xmlns:a16="http://schemas.microsoft.com/office/drawing/2014/main" id="{E6730C07-A3DB-4E73-BB34-11711525B1A5}"/>
+                <a16:creationId xmlns:a16="http://schemas.microsoft.com/office/drawing/2014/main" id="{5B94F637-5824-4C21-BE8A-3693A85A28EB}"/>
               </a:ext>
             </a:extLst>
           </p:cNvPr>
@@ -6416,7 +6416,7 @@
           <p:cNvPr id="19" name="">
             <a:extLst xmlns:a="http://schemas.openxmlformats.org/drawingml/2006/main">
               <a:ext uri="{FF2B5EF4-FFF2-40B4-BE49-F238E27FC236}">
-                <a16:creationId xmlns:a16="http://schemas.microsoft.com/office/drawing/2014/main" id="{7911C59E-3ABC-4F17-BA5C-B9A609321BF6}"/>
+                <a16:creationId xmlns:a16="http://schemas.microsoft.com/office/drawing/2014/main" id="{0AABED59-5E1C-480E-B355-B96733C2849E}"/>
               </a:ext>
             </a:extLst>
           </p:cNvPr>
@@ -6448,7 +6448,7 @@
           <p:cNvPr id="20" name="">
             <a:extLst xmlns:a="http://schemas.openxmlformats.org/drawingml/2006/main">
               <a:ext uri="{FF2B5EF4-FFF2-40B4-BE49-F238E27FC236}">
-                <a16:creationId xmlns:a16="http://schemas.microsoft.com/office/drawing/2014/main" id="{97E5787D-4D64-4250-94E3-9EF1CC52CF83}"/>
+                <a16:creationId xmlns:a16="http://schemas.microsoft.com/office/drawing/2014/main" id="{F0EF6675-756C-4094-970A-349CCAED993E}"/>
               </a:ext>
             </a:extLst>
           </p:cNvPr>
@@ -6505,7 +6505,7 @@
           <p:cNvPr id="21" name="">
             <a:extLst xmlns:a="http://schemas.openxmlformats.org/drawingml/2006/main">
               <a:ext uri="{FF2B5EF4-FFF2-40B4-BE49-F238E27FC236}">
-                <a16:creationId xmlns:a16="http://schemas.microsoft.com/office/drawing/2014/main" id="{520DD87B-E180-4250-953D-26723069B9EE}"/>
+                <a16:creationId xmlns:a16="http://schemas.microsoft.com/office/drawing/2014/main" id="{1BAA00FA-7E9F-4E84-B9D4-E6531E9E1323}"/>
               </a:ext>
             </a:extLst>
           </p:cNvPr>
@@ -6562,7 +6562,7 @@
           <p:cNvPr id="22" name="">
             <a:extLst xmlns:a="http://schemas.openxmlformats.org/drawingml/2006/main">
               <a:ext uri="{FF2B5EF4-FFF2-40B4-BE49-F238E27FC236}">
-                <a16:creationId xmlns:a16="http://schemas.microsoft.com/office/drawing/2014/main" id="{B13FA3C7-F31F-4AB0-8822-0133AFC3F518}"/>
+                <a16:creationId xmlns:a16="http://schemas.microsoft.com/office/drawing/2014/main" id="{D102D281-87C1-436D-8F3F-4B5ACF9E9C47}"/>
               </a:ext>
             </a:extLst>
           </p:cNvPr>
@@ -6617,7 +6617,7 @@
     </p:spTree>
     <p:extLst>
       <p:ext uri="{BB962C8B-B14F-4D97-AF65-F5344CB8AC3E}">
-        <p14:creationId xmlns:p14="http://schemas.microsoft.com/office/powerpoint/2010/main" val="705073605"/>
+        <p14:creationId xmlns:p14="http://schemas.microsoft.com/office/powerpoint/2010/main" val="437064385"/>
       </p:ext>
     </p:extLst>
   </p:cSld>
@@ -6818,7 +6818,7 @@
           <p:cNvPr id="16" name="">
             <a:extLst xmlns:a="http://schemas.openxmlformats.org/drawingml/2006/main">
               <a:ext uri="{FF2B5EF4-FFF2-40B4-BE49-F238E27FC236}">
-                <a16:creationId xmlns:a16="http://schemas.microsoft.com/office/drawing/2014/main" id="{03BAF2BD-F02E-4F64-947B-63C216ABCC3C}"/>
+                <a16:creationId xmlns:a16="http://schemas.microsoft.com/office/drawing/2014/main" id="{1928FBC2-E863-4EE6-9182-A3B5391C8E2E}"/>
               </a:ext>
             </a:extLst>
           </p:cNvPr>
@@ -6850,7 +6850,7 @@
           <p:cNvPr id="2" name="">
             <a:extLst xmlns:a="http://schemas.openxmlformats.org/drawingml/2006/main">
               <a:ext uri="{FF2B5EF4-FFF2-40B4-BE49-F238E27FC236}">
-                <a16:creationId xmlns:a16="http://schemas.microsoft.com/office/drawing/2014/main" id="{1396AA7B-FA55-47FD-BE1F-FBB7143B2E6F}"/>
+                <a16:creationId xmlns:a16="http://schemas.microsoft.com/office/drawing/2014/main" id="{09F1EB5C-D8D6-4E1A-9B19-89C95917E34F}"/>
               </a:ext>
             </a:extLst>
           </p:cNvPr>
@@ -6907,7 +6907,7 @@
           <p:cNvPr id="3" name="">
             <a:extLst xmlns:a="http://schemas.openxmlformats.org/drawingml/2006/main">
               <a:ext uri="{FF2B5EF4-FFF2-40B4-BE49-F238E27FC236}">
-                <a16:creationId xmlns:a16="http://schemas.microsoft.com/office/drawing/2014/main" id="{CC47DB2B-F6BC-4BE8-B4D9-F5118E4760AB}"/>
+                <a16:creationId xmlns:a16="http://schemas.microsoft.com/office/drawing/2014/main" id="{17D67AE6-6999-4ED5-98F0-BFA7DD484FD9}"/>
               </a:ext>
             </a:extLst>
           </p:cNvPr>
@@ -6939,7 +6939,7 @@
           <p:cNvPr id="4" name="">
             <a:extLst xmlns:a="http://schemas.openxmlformats.org/drawingml/2006/main">
               <a:ext uri="{FF2B5EF4-FFF2-40B4-BE49-F238E27FC236}">
-                <a16:creationId xmlns:a16="http://schemas.microsoft.com/office/drawing/2014/main" id="{AA814E51-E8BF-4848-9CDD-091AACB05E30}"/>
+                <a16:creationId xmlns:a16="http://schemas.microsoft.com/office/drawing/2014/main" id="{0E746F75-29C6-4915-9F2A-EF43302B2CB1}"/>
               </a:ext>
             </a:extLst>
           </p:cNvPr>
@@ -6996,7 +6996,7 @@
           <p:cNvPr id="5" name="">
             <a:extLst xmlns:a="http://schemas.openxmlformats.org/drawingml/2006/main">
               <a:ext uri="{FF2B5EF4-FFF2-40B4-BE49-F238E27FC236}">
-                <a16:creationId xmlns:a16="http://schemas.microsoft.com/office/drawing/2014/main" id="{5AEE5160-BC97-4E05-B9A2-E7733049548E}"/>
+                <a16:creationId xmlns:a16="http://schemas.microsoft.com/office/drawing/2014/main" id="{7BB2840F-6B86-422D-87AD-AEE0DE32ACB3}"/>
               </a:ext>
             </a:extLst>
           </p:cNvPr>
@@ -7053,7 +7053,7 @@
           <p:cNvPr id="6" name="">
             <a:extLst xmlns:a="http://schemas.openxmlformats.org/drawingml/2006/main">
               <a:ext uri="{FF2B5EF4-FFF2-40B4-BE49-F238E27FC236}">
-                <a16:creationId xmlns:a16="http://schemas.microsoft.com/office/drawing/2014/main" id="{2944535F-A96B-4965-B6C6-5EECA4B20D9C}"/>
+                <a16:creationId xmlns:a16="http://schemas.microsoft.com/office/drawing/2014/main" id="{9117F956-9FD1-4112-ABC0-4CE8C302FB54}"/>
               </a:ext>
             </a:extLst>
           </p:cNvPr>
@@ -7110,7 +7110,7 @@
           <p:cNvPr id="7" name="">
             <a:extLst xmlns:a="http://schemas.openxmlformats.org/drawingml/2006/main">
               <a:ext uri="{FF2B5EF4-FFF2-40B4-BE49-F238E27FC236}">
-                <a16:creationId xmlns:a16="http://schemas.microsoft.com/office/drawing/2014/main" id="{30CB5890-3F17-452A-857C-FFB8DD3684EE}"/>
+                <a16:creationId xmlns:a16="http://schemas.microsoft.com/office/drawing/2014/main" id="{3F721970-88DE-404E-9AB9-2C61A582D6B5}"/>
               </a:ext>
             </a:extLst>
           </p:cNvPr>
@@ -7142,7 +7142,7 @@
           <p:cNvPr id="8" name="">
             <a:extLst xmlns:a="http://schemas.openxmlformats.org/drawingml/2006/main">
               <a:ext uri="{FF2B5EF4-FFF2-40B4-BE49-F238E27FC236}">
-                <a16:creationId xmlns:a16="http://schemas.microsoft.com/office/drawing/2014/main" id="{D4AB6707-4962-46DD-904D-29E0C7DFB4AD}"/>
+                <a16:creationId xmlns:a16="http://schemas.microsoft.com/office/drawing/2014/main" id="{7ABAE162-9C58-4974-84FB-2F1F2D7CE4BE}"/>
               </a:ext>
             </a:extLst>
           </p:cNvPr>
@@ -7199,7 +7199,7 @@
           <p:cNvPr id="9" name="">
             <a:extLst xmlns:a="http://schemas.openxmlformats.org/drawingml/2006/main">
               <a:ext uri="{FF2B5EF4-FFF2-40B4-BE49-F238E27FC236}">
-                <a16:creationId xmlns:a16="http://schemas.microsoft.com/office/drawing/2014/main" id="{BC5AFD62-4AA6-4B75-8D30-9E2A0BDDBEED}"/>
+                <a16:creationId xmlns:a16="http://schemas.microsoft.com/office/drawing/2014/main" id="{58673C23-1527-4FA6-9685-A85C68AC75B1}"/>
               </a:ext>
             </a:extLst>
           </p:cNvPr>
@@ -7256,7 +7256,7 @@
           <p:cNvPr id="10" name="">
             <a:extLst xmlns:a="http://schemas.openxmlformats.org/drawingml/2006/main">
               <a:ext uri="{FF2B5EF4-FFF2-40B4-BE49-F238E27FC236}">
-                <a16:creationId xmlns:a16="http://schemas.microsoft.com/office/drawing/2014/main" id="{84B4DBE6-5380-4544-9F49-958E48EA6414}"/>
+                <a16:creationId xmlns:a16="http://schemas.microsoft.com/office/drawing/2014/main" id="{B3511A78-BE4E-4390-BDCD-93DAB72C1ECA}"/>
               </a:ext>
             </a:extLst>
           </p:cNvPr>
@@ -7313,7 +7313,7 @@
           <p:cNvPr id="11" name="">
             <a:extLst xmlns:a="http://schemas.openxmlformats.org/drawingml/2006/main">
               <a:ext uri="{FF2B5EF4-FFF2-40B4-BE49-F238E27FC236}">
-                <a16:creationId xmlns:a16="http://schemas.microsoft.com/office/drawing/2014/main" id="{5E2C136D-C89C-4FFF-A7F1-51D38771C038}"/>
+                <a16:creationId xmlns:a16="http://schemas.microsoft.com/office/drawing/2014/main" id="{9E463971-64D6-42FD-8154-845720705732}"/>
               </a:ext>
             </a:extLst>
           </p:cNvPr>
@@ -7345,7 +7345,7 @@
           <p:cNvPr id="12" name="">
             <a:extLst xmlns:a="http://schemas.openxmlformats.org/drawingml/2006/main">
               <a:ext uri="{FF2B5EF4-FFF2-40B4-BE49-F238E27FC236}">
-                <a16:creationId xmlns:a16="http://schemas.microsoft.com/office/drawing/2014/main" id="{527BDC08-A72A-400E-A799-FE87DAC04404}"/>
+                <a16:creationId xmlns:a16="http://schemas.microsoft.com/office/drawing/2014/main" id="{94A8C620-07E9-46F8-85EA-BD1EBAAE5B6B}"/>
               </a:ext>
             </a:extLst>
           </p:cNvPr>
@@ -7402,7 +7402,7 @@
           <p:cNvPr id="13" name="">
             <a:extLst xmlns:a="http://schemas.openxmlformats.org/drawingml/2006/main">
               <a:ext uri="{FF2B5EF4-FFF2-40B4-BE49-F238E27FC236}">
-                <a16:creationId xmlns:a16="http://schemas.microsoft.com/office/drawing/2014/main" id="{26C7E672-C11F-49B1-82E9-DBC15CB15D13}"/>
+                <a16:creationId xmlns:a16="http://schemas.microsoft.com/office/drawing/2014/main" id="{C08A8231-28C1-4557-A644-8B131A72CFEF}"/>
               </a:ext>
             </a:extLst>
           </p:cNvPr>
@@ -7459,7 +7459,7 @@
           <p:cNvPr id="14" name="">
             <a:extLst xmlns:a="http://schemas.openxmlformats.org/drawingml/2006/main">
               <a:ext uri="{FF2B5EF4-FFF2-40B4-BE49-F238E27FC236}">
-                <a16:creationId xmlns:a16="http://schemas.microsoft.com/office/drawing/2014/main" id="{4C07037B-80C5-4943-BCA9-579A3A06E23D}"/>
+                <a16:creationId xmlns:a16="http://schemas.microsoft.com/office/drawing/2014/main" id="{F93687A6-3768-41CD-B43A-28288D478629}"/>
               </a:ext>
             </a:extLst>
           </p:cNvPr>
@@ -7516,7 +7516,7 @@
           <p:cNvPr id="15" name="">
             <a:extLst xmlns:a="http://schemas.openxmlformats.org/drawingml/2006/main">
               <a:ext uri="{FF2B5EF4-FFF2-40B4-BE49-F238E27FC236}">
-                <a16:creationId xmlns:a16="http://schemas.microsoft.com/office/drawing/2014/main" id="{BEECCC22-BFC6-4822-B3C5-2F00CD72A03E}"/>
+                <a16:creationId xmlns:a16="http://schemas.microsoft.com/office/drawing/2014/main" id="{73C22EE9-C829-4CD4-A052-3D84E33398BA}"/>
               </a:ext>
             </a:extLst>
           </p:cNvPr>
@@ -7571,7 +7571,7 @@
     </p:spTree>
     <p:extLst>
       <p:ext uri="{BB962C8B-B14F-4D97-AF65-F5344CB8AC3E}">
-        <p14:creationId xmlns:p14="http://schemas.microsoft.com/office/powerpoint/2010/main" val="941230754"/>
+        <p14:creationId xmlns:p14="http://schemas.microsoft.com/office/powerpoint/2010/main" val="528958033"/>
       </p:ext>
     </p:extLst>
   </p:cSld>
@@ -7769,10 +7769,10 @@
       </p:grpSpPr>
       <p:sp>
         <p:nvSpPr>
-          <p:cNvPr id="23" name="">
-            <a:extLst xmlns:a="http://schemas.openxmlformats.org/drawingml/2006/main">
-              <a:ext uri="{FF2B5EF4-FFF2-40B4-BE49-F238E27FC236}">
-                <a16:creationId xmlns:a16="http://schemas.microsoft.com/office/drawing/2014/main" id="{21E8FFFF-DCED-496E-9525-29CB9A501645}"/>
+          <p:cNvPr id="26" name="">
+            <a:extLst xmlns:a="http://schemas.openxmlformats.org/drawingml/2006/main">
+              <a:ext uri="{FF2B5EF4-FFF2-40B4-BE49-F238E27FC236}">
+                <a16:creationId xmlns:a16="http://schemas.microsoft.com/office/drawing/2014/main" id="{87BE6D95-9F6B-49A3-99BD-FE22986DD4E5}"/>
               </a:ext>
             </a:extLst>
           </p:cNvPr>
@@ -7804,7 +7804,7 @@
           <p:cNvPr id="2" name="">
             <a:extLst xmlns:a="http://schemas.openxmlformats.org/drawingml/2006/main">
               <a:ext uri="{FF2B5EF4-FFF2-40B4-BE49-F238E27FC236}">
-                <a16:creationId xmlns:a16="http://schemas.microsoft.com/office/drawing/2014/main" id="{935549A2-A29C-46EF-9DEA-4C182D65BF80}"/>
+                <a16:creationId xmlns:a16="http://schemas.microsoft.com/office/drawing/2014/main" id="{7AD5678E-AAE4-476C-B286-6BC9DB8BC3CB}"/>
               </a:ext>
             </a:extLst>
           </p:cNvPr>
@@ -7861,7 +7861,7 @@
           <p:cNvPr id="3" name="">
             <a:extLst xmlns:a="http://schemas.openxmlformats.org/drawingml/2006/main">
               <a:ext uri="{FF2B5EF4-FFF2-40B4-BE49-F238E27FC236}">
-                <a16:creationId xmlns:a16="http://schemas.microsoft.com/office/drawing/2014/main" id="{1CA4E561-4C4F-4CB7-9206-60B8C792278A}"/>
+                <a16:creationId xmlns:a16="http://schemas.microsoft.com/office/drawing/2014/main" id="{99DB5382-76D3-4ABB-B7B6-8F2D3FBF2199}"/>
               </a:ext>
             </a:extLst>
           </p:cNvPr>
@@ -7893,7 +7893,7 @@
           <p:cNvPr id="4" name="">
             <a:extLst xmlns:a="http://schemas.openxmlformats.org/drawingml/2006/main">
               <a:ext uri="{FF2B5EF4-FFF2-40B4-BE49-F238E27FC236}">
-                <a16:creationId xmlns:a16="http://schemas.microsoft.com/office/drawing/2014/main" id="{718271DA-9111-432D-849C-6638A0467D84}"/>
+                <a16:creationId xmlns:a16="http://schemas.microsoft.com/office/drawing/2014/main" id="{5343BEED-6B5E-4FF7-B967-ECAD3294ED70}"/>
               </a:ext>
             </a:extLst>
           </p:cNvPr>
@@ -7950,7 +7950,7 @@
           <p:cNvPr id="5" name="">
             <a:extLst xmlns:a="http://schemas.openxmlformats.org/drawingml/2006/main">
               <a:ext uri="{FF2B5EF4-FFF2-40B4-BE49-F238E27FC236}">
-                <a16:creationId xmlns:a16="http://schemas.microsoft.com/office/drawing/2014/main" id="{5A88DF71-B91F-4FDE-AC0E-02DD658271FF}"/>
+                <a16:creationId xmlns:a16="http://schemas.microsoft.com/office/drawing/2014/main" id="{C1B3DEBF-4FCE-414A-9298-5288DD602832}"/>
               </a:ext>
             </a:extLst>
           </p:cNvPr>
@@ -8007,7 +8007,7 @@
           <p:cNvPr id="6" name="">
             <a:extLst xmlns:a="http://schemas.openxmlformats.org/drawingml/2006/main">
               <a:ext uri="{FF2B5EF4-FFF2-40B4-BE49-F238E27FC236}">
-                <a16:creationId xmlns:a16="http://schemas.microsoft.com/office/drawing/2014/main" id="{76AEA297-C559-4954-9F9B-36131210AF0D}"/>
+                <a16:creationId xmlns:a16="http://schemas.microsoft.com/office/drawing/2014/main" id="{B92E0F4C-E5F8-446C-A85F-4591AE26FA19}"/>
               </a:ext>
             </a:extLst>
           </p:cNvPr>
@@ -8064,7 +8064,7 @@
           <p:cNvPr id="7" name="">
             <a:extLst xmlns:a="http://schemas.openxmlformats.org/drawingml/2006/main">
               <a:ext uri="{FF2B5EF4-FFF2-40B4-BE49-F238E27FC236}">
-                <a16:creationId xmlns:a16="http://schemas.microsoft.com/office/drawing/2014/main" id="{6B056FCA-129C-40F3-B370-55D744CAE6A0}"/>
+                <a16:creationId xmlns:a16="http://schemas.microsoft.com/office/drawing/2014/main" id="{8697E1F9-BA8D-4824-8240-FA138D1E4D39}"/>
               </a:ext>
             </a:extLst>
           </p:cNvPr>
@@ -8096,7 +8096,7 @@
           <p:cNvPr id="8" name="">
             <a:extLst xmlns:a="http://schemas.openxmlformats.org/drawingml/2006/main">
               <a:ext uri="{FF2B5EF4-FFF2-40B4-BE49-F238E27FC236}">
-                <a16:creationId xmlns:a16="http://schemas.microsoft.com/office/drawing/2014/main" id="{F58298EB-C6AA-47DF-A095-FA38A2900026}"/>
+                <a16:creationId xmlns:a16="http://schemas.microsoft.com/office/drawing/2014/main" id="{3B31B633-E396-4841-BD2F-20C75E2F54A8}"/>
               </a:ext>
             </a:extLst>
           </p:cNvPr>
@@ -8153,7 +8153,7 @@
           <p:cNvPr id="9" name="">
             <a:extLst xmlns:a="http://schemas.openxmlformats.org/drawingml/2006/main">
               <a:ext uri="{FF2B5EF4-FFF2-40B4-BE49-F238E27FC236}">
-                <a16:creationId xmlns:a16="http://schemas.microsoft.com/office/drawing/2014/main" id="{151C2A35-E8D0-42B5-B779-51142BF42002}"/>
+                <a16:creationId xmlns:a16="http://schemas.microsoft.com/office/drawing/2014/main" id="{6762DBCC-BF3C-4FF5-B33E-49C603745E9F}"/>
               </a:ext>
             </a:extLst>
           </p:cNvPr>
@@ -8210,19 +8210,19 @@
           <p:cNvPr id="10" name="">
             <a:extLst xmlns:a="http://schemas.openxmlformats.org/drawingml/2006/main">
               <a:ext uri="{FF2B5EF4-FFF2-40B4-BE49-F238E27FC236}">
-                <a16:creationId xmlns:a16="http://schemas.microsoft.com/office/drawing/2014/main" id="{C57F8653-F30A-4931-85B1-5261DE9C3E73}"/>
-              </a:ext>
-            </a:extLst>
-          </p:cNvPr>
-          <p:cNvSpPr>
-            <a:spLocks xmlns:a="http://schemas.openxmlformats.org/drawingml/2006/main" noGrp="1"/>
-          </p:cNvSpPr>
-          <p:nvPr/>
-        </p:nvSpPr>
-        <p:spPr>
-          <a:xfrm xmlns:a="http://schemas.openxmlformats.org/drawingml/2006/main">
-            <a:off x="914400" y="1257300"/>
-            <a:ext cx="10363200" cy="781050"/>
+                <a16:creationId xmlns:a16="http://schemas.microsoft.com/office/drawing/2014/main" id="{A0CD8125-4693-4275-B9BB-DE11A8267E00}"/>
+              </a:ext>
+            </a:extLst>
+          </p:cNvPr>
+          <p:cNvSpPr>
+            <a:spLocks xmlns:a="http://schemas.openxmlformats.org/drawingml/2006/main" noGrp="1"/>
+          </p:cNvSpPr>
+          <p:nvPr/>
+        </p:nvSpPr>
+        <p:spPr>
+          <a:xfrm xmlns:a="http://schemas.openxmlformats.org/drawingml/2006/main">
+            <a:off x="857250" y="1219200"/>
+            <a:ext cx="10477500" cy="742950"/>
           </a:xfrm>
           <a:prstGeom xmlns:a="http://schemas.openxmlformats.org/drawingml/2006/main" prst="rect">
             <a:avLst/>
@@ -8239,7 +8239,7 @@
           <a:lstStyle xmlns:a="http://schemas.openxmlformats.org/drawingml/2006/main"/>
           <a:p xmlns:a="http://schemas.openxmlformats.org/drawingml/2006/main">
             <a:pPr algn="ctr">
-              <a:defRPr sz="2175" b="1">
+              <a:defRPr sz="2100" b="1">
                 <a:solidFill>
                   <a:srgbClr val="17253A"/>
                 </a:solidFill>
@@ -8249,7 +8249,7 @@
               </a:defRPr>
             </a:pPr>
             <a:r>
-              <a:rPr sz="2175" b="1">
+              <a:rPr sz="2100" b="1">
                 <a:solidFill>
                   <a:srgbClr val="17253A"/>
                 </a:solidFill>
@@ -8267,28 +8267,30 @@
           <p:cNvPr id="11" name="">
             <a:extLst xmlns:a="http://schemas.openxmlformats.org/drawingml/2006/main">
               <a:ext uri="{FF2B5EF4-FFF2-40B4-BE49-F238E27FC236}">
-                <a16:creationId xmlns:a16="http://schemas.microsoft.com/office/drawing/2014/main" id="{0363ED39-B0FB-42D9-8CBF-237CFB3E4DB7}"/>
-              </a:ext>
-            </a:extLst>
-          </p:cNvPr>
-          <p:cNvSpPr>
-            <a:spLocks xmlns:a="http://schemas.openxmlformats.org/drawingml/2006/main" noGrp="1"/>
-          </p:cNvSpPr>
-          <p:nvPr/>
-        </p:nvSpPr>
-        <p:spPr>
-          <a:xfrm xmlns:a="http://schemas.openxmlformats.org/drawingml/2006/main">
-            <a:off x="1000125" y="2247900"/>
-            <a:ext cx="476250" cy="476250"/>
-          </a:xfrm>
-          <a:prstGeom xmlns:a="http://schemas.openxmlformats.org/drawingml/2006/main" prst="ellipse">
+                <a16:creationId xmlns:a16="http://schemas.microsoft.com/office/drawing/2014/main" id="{5BF6F4A7-885D-4157-AB89-35CFFCB63522}"/>
+              </a:ext>
+            </a:extLst>
+          </p:cNvPr>
+          <p:cNvSpPr>
+            <a:spLocks xmlns:a="http://schemas.openxmlformats.org/drawingml/2006/main" noGrp="1"/>
+          </p:cNvSpPr>
+          <p:nvPr/>
+        </p:nvSpPr>
+        <p:spPr>
+          <a:xfrm xmlns:a="http://schemas.openxmlformats.org/drawingml/2006/main">
+            <a:off x="971550" y="2124075"/>
+            <a:ext cx="38100" cy="3524250"/>
+          </a:xfrm>
+          <a:prstGeom xmlns:a="http://schemas.openxmlformats.org/drawingml/2006/main" prst="rect">
             <a:avLst/>
           </a:prstGeom>
           <a:solidFill xmlns:a="http://schemas.openxmlformats.org/drawingml/2006/main">
-            <a:srgbClr val="18324A"/>
+            <a:srgbClr val="2C6E73"/>
           </a:solidFill>
           <a:ln xmlns:a="http://schemas.openxmlformats.org/drawingml/2006/main" w="0">
-            <a:noFill/>
+            <a:solidFill>
+              <a:srgbClr val="2C6E73"/>
+            </a:solidFill>
           </a:ln>
         </p:spPr>
       </p:sp>
@@ -8297,19 +8299,19 @@
           <p:cNvPr id="12" name="">
             <a:extLst xmlns:a="http://schemas.openxmlformats.org/drawingml/2006/main">
               <a:ext uri="{FF2B5EF4-FFF2-40B4-BE49-F238E27FC236}">
-                <a16:creationId xmlns:a16="http://schemas.microsoft.com/office/drawing/2014/main" id="{DDB9BFA0-C378-4F87-8CD5-F4C3A8C0C7FF}"/>
-              </a:ext>
-            </a:extLst>
-          </p:cNvPr>
-          <p:cNvSpPr>
-            <a:spLocks xmlns:a="http://schemas.openxmlformats.org/drawingml/2006/main" noGrp="1"/>
-          </p:cNvSpPr>
-          <p:nvPr/>
-        </p:nvSpPr>
-        <p:spPr>
-          <a:xfrm xmlns:a="http://schemas.openxmlformats.org/drawingml/2006/main">
-            <a:off x="1000125" y="2276475"/>
-            <a:ext cx="476250" cy="419100"/>
+                <a16:creationId xmlns:a16="http://schemas.microsoft.com/office/drawing/2014/main" id="{4CAA623C-D17B-4AFC-B4C5-02240A5CB24A}"/>
+              </a:ext>
+            </a:extLst>
+          </p:cNvPr>
+          <p:cNvSpPr>
+            <a:spLocks xmlns:a="http://schemas.openxmlformats.org/drawingml/2006/main" noGrp="1"/>
+          </p:cNvSpPr>
+          <p:nvPr/>
+        </p:nvSpPr>
+        <p:spPr>
+          <a:xfrm xmlns:a="http://schemas.openxmlformats.org/drawingml/2006/main">
+            <a:off x="1162050" y="2200275"/>
+            <a:ext cx="400050" cy="400050"/>
           </a:xfrm>
           <a:prstGeom xmlns:a="http://schemas.openxmlformats.org/drawingml/2006/main" prst="rect">
             <a:avLst/>
@@ -8326,9 +8328,9 @@
           <a:lstStyle xmlns:a="http://schemas.openxmlformats.org/drawingml/2006/main"/>
           <a:p xmlns:a="http://schemas.openxmlformats.org/drawingml/2006/main">
             <a:pPr algn="ctr">
-              <a:defRPr sz="1350" b="1">
-                <a:solidFill>
-                  <a:srgbClr val="FFFFFF"/>
+              <a:defRPr sz="1125" b="1">
+                <a:solidFill>
+                  <a:srgbClr val="2C6E73"/>
                 </a:solidFill>
                 <a:latin typeface="Arial"/>
                 <a:ea typeface="Arial"/>
@@ -8336,9 +8338,9 @@
               </a:defRPr>
             </a:pPr>
             <a:r>
-              <a:rPr sz="1350" b="1">
-                <a:solidFill>
-                  <a:srgbClr val="FFFFFF"/>
+              <a:rPr sz="1125" b="1">
+                <a:solidFill>
+                  <a:srgbClr val="2C6E73"/>
                 </a:solidFill>
                 <a:latin typeface="Arial"/>
                 <a:ea typeface="Arial"/>
@@ -8354,19 +8356,19 @@
           <p:cNvPr id="13" name="">
             <a:extLst xmlns:a="http://schemas.openxmlformats.org/drawingml/2006/main">
               <a:ext uri="{FF2B5EF4-FFF2-40B4-BE49-F238E27FC236}">
-                <a16:creationId xmlns:a16="http://schemas.microsoft.com/office/drawing/2014/main" id="{A441699A-DE52-4732-B84F-2EEDB770478C}"/>
-              </a:ext>
-            </a:extLst>
-          </p:cNvPr>
-          <p:cNvSpPr>
-            <a:spLocks xmlns:a="http://schemas.openxmlformats.org/drawingml/2006/main" noGrp="1"/>
-          </p:cNvSpPr>
-          <p:nvPr/>
-        </p:nvSpPr>
-        <p:spPr>
-          <a:xfrm xmlns:a="http://schemas.openxmlformats.org/drawingml/2006/main">
-            <a:off x="1714500" y="2181225"/>
-            <a:ext cx="9429750" cy="609600"/>
+                <a16:creationId xmlns:a16="http://schemas.microsoft.com/office/drawing/2014/main" id="{EB3DE528-6800-41DA-B04D-E39047D28788}"/>
+              </a:ext>
+            </a:extLst>
+          </p:cNvPr>
+          <p:cNvSpPr>
+            <a:spLocks xmlns:a="http://schemas.openxmlformats.org/drawingml/2006/main" noGrp="1"/>
+          </p:cNvSpPr>
+          <p:nvPr/>
+        </p:nvSpPr>
+        <p:spPr>
+          <a:xfrm xmlns:a="http://schemas.openxmlformats.org/drawingml/2006/main">
+            <a:off x="1714500" y="2114550"/>
+            <a:ext cx="9525000" cy="638175"/>
           </a:xfrm>
           <a:prstGeom xmlns:a="http://schemas.openxmlformats.org/drawingml/2006/main" prst="rect">
             <a:avLst/>
@@ -8383,7 +8385,7 @@
           <a:lstStyle xmlns:a="http://schemas.openxmlformats.org/drawingml/2006/main"/>
           <a:p xmlns:a="http://schemas.openxmlformats.org/drawingml/2006/main">
             <a:pPr algn="l">
-              <a:defRPr sz="1500" b="0">
+              <a:defRPr sz="1575" b="0">
                 <a:solidFill>
                   <a:srgbClr val="17253A"/>
                 </a:solidFill>
@@ -8393,7 +8395,7 @@
               </a:defRPr>
             </a:pPr>
             <a:r>
-              <a:rPr sz="1500" b="0">
+              <a:rPr sz="1575" b="0">
                 <a:solidFill>
                   <a:srgbClr val="17253A"/>
                 </a:solidFill>
@@ -8401,7 +8403,7 @@
                 <a:ea typeface="Arial"/>
                 <a:cs typeface="Arial"/>
               </a:rPr>
-              <a:t>Identify the structure: Estimate the product before calculating.</a:t>
+              <a:t>1,248 seats × 24 sections</a:t>
             </a:r>
           </a:p>
         </p:txBody>
@@ -8411,28 +8413,30 @@
           <p:cNvPr id="14" name="">
             <a:extLst xmlns:a="http://schemas.openxmlformats.org/drawingml/2006/main">
               <a:ext uri="{FF2B5EF4-FFF2-40B4-BE49-F238E27FC236}">
-                <a16:creationId xmlns:a16="http://schemas.microsoft.com/office/drawing/2014/main" id="{95E8B7D4-42EF-43BE-9E98-E2C7300A28D3}"/>
-              </a:ext>
-            </a:extLst>
-          </p:cNvPr>
-          <p:cNvSpPr>
-            <a:spLocks xmlns:a="http://schemas.openxmlformats.org/drawingml/2006/main" noGrp="1"/>
-          </p:cNvSpPr>
-          <p:nvPr/>
-        </p:nvSpPr>
-        <p:spPr>
-          <a:xfrm xmlns:a="http://schemas.openxmlformats.org/drawingml/2006/main">
-            <a:off x="1000125" y="2990850"/>
-            <a:ext cx="476250" cy="476250"/>
-          </a:xfrm>
-          <a:prstGeom xmlns:a="http://schemas.openxmlformats.org/drawingml/2006/main" prst="ellipse">
+                <a16:creationId xmlns:a16="http://schemas.microsoft.com/office/drawing/2014/main" id="{BC634B1B-C324-46DC-A9A5-81F62B47D1A1}"/>
+              </a:ext>
+            </a:extLst>
+          </p:cNvPr>
+          <p:cNvSpPr>
+            <a:spLocks xmlns:a="http://schemas.openxmlformats.org/drawingml/2006/main" noGrp="1"/>
+          </p:cNvSpPr>
+          <p:nvPr/>
+        </p:nvSpPr>
+        <p:spPr>
+          <a:xfrm xmlns:a="http://schemas.openxmlformats.org/drawingml/2006/main">
+            <a:off x="1714500" y="2771775"/>
+            <a:ext cx="9334500" cy="9525"/>
+          </a:xfrm>
+          <a:prstGeom xmlns:a="http://schemas.openxmlformats.org/drawingml/2006/main" prst="rect">
             <a:avLst/>
           </a:prstGeom>
           <a:solidFill xmlns:a="http://schemas.openxmlformats.org/drawingml/2006/main">
-            <a:srgbClr val="2C6E73"/>
+            <a:srgbClr val="D9E0E6"/>
           </a:solidFill>
           <a:ln xmlns:a="http://schemas.openxmlformats.org/drawingml/2006/main" w="0">
-            <a:noFill/>
+            <a:solidFill>
+              <a:srgbClr val="D9E0E6"/>
+            </a:solidFill>
           </a:ln>
         </p:spPr>
       </p:sp>
@@ -8441,19 +8445,19 @@
           <p:cNvPr id="15" name="">
             <a:extLst xmlns:a="http://schemas.openxmlformats.org/drawingml/2006/main">
               <a:ext uri="{FF2B5EF4-FFF2-40B4-BE49-F238E27FC236}">
-                <a16:creationId xmlns:a16="http://schemas.microsoft.com/office/drawing/2014/main" id="{772D8C15-191E-4FEC-B1F9-529494A3E99B}"/>
-              </a:ext>
-            </a:extLst>
-          </p:cNvPr>
-          <p:cNvSpPr>
-            <a:spLocks xmlns:a="http://schemas.openxmlformats.org/drawingml/2006/main" noGrp="1"/>
-          </p:cNvSpPr>
-          <p:nvPr/>
-        </p:nvSpPr>
-        <p:spPr>
-          <a:xfrm xmlns:a="http://schemas.openxmlformats.org/drawingml/2006/main">
-            <a:off x="1000125" y="3019425"/>
-            <a:ext cx="476250" cy="419100"/>
+                <a16:creationId xmlns:a16="http://schemas.microsoft.com/office/drawing/2014/main" id="{88AE34BF-0888-40B8-9258-61EFB5845125}"/>
+              </a:ext>
+            </a:extLst>
+          </p:cNvPr>
+          <p:cNvSpPr>
+            <a:spLocks xmlns:a="http://schemas.openxmlformats.org/drawingml/2006/main" noGrp="1"/>
+          </p:cNvSpPr>
+          <p:nvPr/>
+        </p:nvSpPr>
+        <p:spPr>
+          <a:xfrm xmlns:a="http://schemas.openxmlformats.org/drawingml/2006/main">
+            <a:off x="1162050" y="2905125"/>
+            <a:ext cx="400050" cy="400050"/>
           </a:xfrm>
           <a:prstGeom xmlns:a="http://schemas.openxmlformats.org/drawingml/2006/main" prst="rect">
             <a:avLst/>
@@ -8470,9 +8474,9 @@
           <a:lstStyle xmlns:a="http://schemas.openxmlformats.org/drawingml/2006/main"/>
           <a:p xmlns:a="http://schemas.openxmlformats.org/drawingml/2006/main">
             <a:pPr algn="ctr">
-              <a:defRPr sz="1350" b="1">
-                <a:solidFill>
-                  <a:srgbClr val="FFFFFF"/>
+              <a:defRPr sz="1125" b="1">
+                <a:solidFill>
+                  <a:srgbClr val="2C6E73"/>
                 </a:solidFill>
                 <a:latin typeface="Arial"/>
                 <a:ea typeface="Arial"/>
@@ -8480,9 +8484,9 @@
               </a:defRPr>
             </a:pPr>
             <a:r>
-              <a:rPr sz="1350" b="1">
-                <a:solidFill>
-                  <a:srgbClr val="FFFFFF"/>
+              <a:rPr sz="1125" b="1">
+                <a:solidFill>
+                  <a:srgbClr val="2C6E73"/>
                 </a:solidFill>
                 <a:latin typeface="Arial"/>
                 <a:ea typeface="Arial"/>
@@ -8498,19 +8502,19 @@
           <p:cNvPr id="16" name="">
             <a:extLst xmlns:a="http://schemas.openxmlformats.org/drawingml/2006/main">
               <a:ext uri="{FF2B5EF4-FFF2-40B4-BE49-F238E27FC236}">
-                <a16:creationId xmlns:a16="http://schemas.microsoft.com/office/drawing/2014/main" id="{AF351F14-808B-463B-BD70-21D0223DCAFA}"/>
-              </a:ext>
-            </a:extLst>
-          </p:cNvPr>
-          <p:cNvSpPr>
-            <a:spLocks xmlns:a="http://schemas.openxmlformats.org/drawingml/2006/main" noGrp="1"/>
-          </p:cNvSpPr>
-          <p:nvPr/>
-        </p:nvSpPr>
-        <p:spPr>
-          <a:xfrm xmlns:a="http://schemas.openxmlformats.org/drawingml/2006/main">
-            <a:off x="1714500" y="2924175"/>
-            <a:ext cx="9429750" cy="609600"/>
+                <a16:creationId xmlns:a16="http://schemas.microsoft.com/office/drawing/2014/main" id="{4742F279-D6D5-4AA0-81C9-7829626E947C}"/>
+              </a:ext>
+            </a:extLst>
+          </p:cNvPr>
+          <p:cNvSpPr>
+            <a:spLocks xmlns:a="http://schemas.openxmlformats.org/drawingml/2006/main" noGrp="1"/>
+          </p:cNvSpPr>
+          <p:nvPr/>
+        </p:nvSpPr>
+        <p:spPr>
+          <a:xfrm xmlns:a="http://schemas.openxmlformats.org/drawingml/2006/main">
+            <a:off x="1714500" y="2819400"/>
+            <a:ext cx="9525000" cy="638175"/>
           </a:xfrm>
           <a:prstGeom xmlns:a="http://schemas.openxmlformats.org/drawingml/2006/main" prst="rect">
             <a:avLst/>
@@ -8527,7 +8531,7 @@
           <a:lstStyle xmlns:a="http://schemas.openxmlformats.org/drawingml/2006/main"/>
           <a:p xmlns:a="http://schemas.openxmlformats.org/drawingml/2006/main">
             <a:pPr algn="l">
-              <a:defRPr sz="1500" b="0">
+              <a:defRPr sz="1575" b="0">
                 <a:solidFill>
                   <a:srgbClr val="17253A"/>
                 </a:solidFill>
@@ -8537,7 +8541,7 @@
               </a:defRPr>
             </a:pPr>
             <a:r>
-              <a:rPr sz="1500" b="0">
+              <a:rPr sz="1575" b="0">
                 <a:solidFill>
                   <a:srgbClr val="17253A"/>
                 </a:solidFill>
@@ -8545,7 +8549,7 @@
                 <a:ea typeface="Arial"/>
                 <a:cs typeface="Arial"/>
               </a:rPr>
-              <a:t>Set up the method: Multiply by the ones, then multiply by the tens using correct place value.</a:t>
+              <a:t>1,248 × 4 = 4,992</a:t>
             </a:r>
           </a:p>
         </p:txBody>
@@ -8555,28 +8559,30 @@
           <p:cNvPr id="17" name="">
             <a:extLst xmlns:a="http://schemas.openxmlformats.org/drawingml/2006/main">
               <a:ext uri="{FF2B5EF4-FFF2-40B4-BE49-F238E27FC236}">
-                <a16:creationId xmlns:a16="http://schemas.microsoft.com/office/drawing/2014/main" id="{833D85F1-DE33-4A54-80F1-9C6C5DEA65F8}"/>
-              </a:ext>
-            </a:extLst>
-          </p:cNvPr>
-          <p:cNvSpPr>
-            <a:spLocks xmlns:a="http://schemas.openxmlformats.org/drawingml/2006/main" noGrp="1"/>
-          </p:cNvSpPr>
-          <p:nvPr/>
-        </p:nvSpPr>
-        <p:spPr>
-          <a:xfrm xmlns:a="http://schemas.openxmlformats.org/drawingml/2006/main">
-            <a:off x="1000125" y="3733800"/>
-            <a:ext cx="476250" cy="476250"/>
-          </a:xfrm>
-          <a:prstGeom xmlns:a="http://schemas.openxmlformats.org/drawingml/2006/main" prst="ellipse">
+                <a16:creationId xmlns:a16="http://schemas.microsoft.com/office/drawing/2014/main" id="{CA05BC0D-9226-437E-9EE3-9E10A2BA1FB9}"/>
+              </a:ext>
+            </a:extLst>
+          </p:cNvPr>
+          <p:cNvSpPr>
+            <a:spLocks xmlns:a="http://schemas.openxmlformats.org/drawingml/2006/main" noGrp="1"/>
+          </p:cNvSpPr>
+          <p:nvPr/>
+        </p:nvSpPr>
+        <p:spPr>
+          <a:xfrm xmlns:a="http://schemas.openxmlformats.org/drawingml/2006/main">
+            <a:off x="1714500" y="3476625"/>
+            <a:ext cx="9334500" cy="9525"/>
+          </a:xfrm>
+          <a:prstGeom xmlns:a="http://schemas.openxmlformats.org/drawingml/2006/main" prst="rect">
             <a:avLst/>
           </a:prstGeom>
           <a:solidFill xmlns:a="http://schemas.openxmlformats.org/drawingml/2006/main">
-            <a:srgbClr val="2C6E73"/>
+            <a:srgbClr val="D9E0E6"/>
           </a:solidFill>
           <a:ln xmlns:a="http://schemas.openxmlformats.org/drawingml/2006/main" w="0">
-            <a:noFill/>
+            <a:solidFill>
+              <a:srgbClr val="D9E0E6"/>
+            </a:solidFill>
           </a:ln>
         </p:spPr>
       </p:sp>
@@ -8585,19 +8591,19 @@
           <p:cNvPr id="18" name="">
             <a:extLst xmlns:a="http://schemas.openxmlformats.org/drawingml/2006/main">
               <a:ext uri="{FF2B5EF4-FFF2-40B4-BE49-F238E27FC236}">
-                <a16:creationId xmlns:a16="http://schemas.microsoft.com/office/drawing/2014/main" id="{1D04C9C7-B901-49E2-8D65-E201CF76D9D9}"/>
-              </a:ext>
-            </a:extLst>
-          </p:cNvPr>
-          <p:cNvSpPr>
-            <a:spLocks xmlns:a="http://schemas.openxmlformats.org/drawingml/2006/main" noGrp="1"/>
-          </p:cNvSpPr>
-          <p:nvPr/>
-        </p:nvSpPr>
-        <p:spPr>
-          <a:xfrm xmlns:a="http://schemas.openxmlformats.org/drawingml/2006/main">
-            <a:off x="1000125" y="3762375"/>
-            <a:ext cx="476250" cy="419100"/>
+                <a16:creationId xmlns:a16="http://schemas.microsoft.com/office/drawing/2014/main" id="{0D57F887-E282-4F2E-BDE1-3F90159F2997}"/>
+              </a:ext>
+            </a:extLst>
+          </p:cNvPr>
+          <p:cNvSpPr>
+            <a:spLocks xmlns:a="http://schemas.openxmlformats.org/drawingml/2006/main" noGrp="1"/>
+          </p:cNvSpPr>
+          <p:nvPr/>
+        </p:nvSpPr>
+        <p:spPr>
+          <a:xfrm xmlns:a="http://schemas.openxmlformats.org/drawingml/2006/main">
+            <a:off x="1162050" y="3609975"/>
+            <a:ext cx="400050" cy="400050"/>
           </a:xfrm>
           <a:prstGeom xmlns:a="http://schemas.openxmlformats.org/drawingml/2006/main" prst="rect">
             <a:avLst/>
@@ -8614,9 +8620,9 @@
           <a:lstStyle xmlns:a="http://schemas.openxmlformats.org/drawingml/2006/main"/>
           <a:p xmlns:a="http://schemas.openxmlformats.org/drawingml/2006/main">
             <a:pPr algn="ctr">
-              <a:defRPr sz="1350" b="1">
-                <a:solidFill>
-                  <a:srgbClr val="FFFFFF"/>
+              <a:defRPr sz="1125" b="1">
+                <a:solidFill>
+                  <a:srgbClr val="2C6E73"/>
                 </a:solidFill>
                 <a:latin typeface="Arial"/>
                 <a:ea typeface="Arial"/>
@@ -8624,9 +8630,9 @@
               </a:defRPr>
             </a:pPr>
             <a:r>
-              <a:rPr sz="1350" b="1">
-                <a:solidFill>
-                  <a:srgbClr val="FFFFFF"/>
+              <a:rPr sz="1125" b="1">
+                <a:solidFill>
+                  <a:srgbClr val="2C6E73"/>
                 </a:solidFill>
                 <a:latin typeface="Arial"/>
                 <a:ea typeface="Arial"/>
@@ -8642,19 +8648,19 @@
           <p:cNvPr id="19" name="">
             <a:extLst xmlns:a="http://schemas.openxmlformats.org/drawingml/2006/main">
               <a:ext uri="{FF2B5EF4-FFF2-40B4-BE49-F238E27FC236}">
-                <a16:creationId xmlns:a16="http://schemas.microsoft.com/office/drawing/2014/main" id="{DDEF0E5A-D1AA-453C-B3C8-7DBF1AF631EA}"/>
-              </a:ext>
-            </a:extLst>
-          </p:cNvPr>
-          <p:cNvSpPr>
-            <a:spLocks xmlns:a="http://schemas.openxmlformats.org/drawingml/2006/main" noGrp="1"/>
-          </p:cNvSpPr>
-          <p:nvPr/>
-        </p:nvSpPr>
-        <p:spPr>
-          <a:xfrm xmlns:a="http://schemas.openxmlformats.org/drawingml/2006/main">
-            <a:off x="1714500" y="3667125"/>
-            <a:ext cx="9429750" cy="609600"/>
+                <a16:creationId xmlns:a16="http://schemas.microsoft.com/office/drawing/2014/main" id="{E8066246-D002-402A-ADF1-A8F545620E12}"/>
+              </a:ext>
+            </a:extLst>
+          </p:cNvPr>
+          <p:cNvSpPr>
+            <a:spLocks xmlns:a="http://schemas.openxmlformats.org/drawingml/2006/main" noGrp="1"/>
+          </p:cNvSpPr>
+          <p:nvPr/>
+        </p:nvSpPr>
+        <p:spPr>
+          <a:xfrm xmlns:a="http://schemas.openxmlformats.org/drawingml/2006/main">
+            <a:off x="1714500" y="3524250"/>
+            <a:ext cx="9525000" cy="638175"/>
           </a:xfrm>
           <a:prstGeom xmlns:a="http://schemas.openxmlformats.org/drawingml/2006/main" prst="rect">
             <a:avLst/>
@@ -8671,7 +8677,7 @@
           <a:lstStyle xmlns:a="http://schemas.openxmlformats.org/drawingml/2006/main"/>
           <a:p xmlns:a="http://schemas.openxmlformats.org/drawingml/2006/main">
             <a:pPr algn="l">
-              <a:defRPr sz="1500" b="0">
+              <a:defRPr sz="1575" b="0">
                 <a:solidFill>
                   <a:srgbClr val="17253A"/>
                 </a:solidFill>
@@ -8681,7 +8687,7 @@
               </a:defRPr>
             </a:pPr>
             <a:r>
-              <a:rPr sz="1500" b="0">
+              <a:rPr sz="1575" b="0">
                 <a:solidFill>
                   <a:srgbClr val="17253A"/>
                 </a:solidFill>
@@ -8689,7 +8695,7 @@
                 <a:ea typeface="Arial"/>
                 <a:cs typeface="Arial"/>
               </a:rPr>
-              <a:t>Complete the calculation: 29,952 seats.</a:t>
+              <a:t>1,248 × 20 = 24,960</a:t>
             </a:r>
           </a:p>
         </p:txBody>
@@ -8699,28 +8705,30 @@
           <p:cNvPr id="20" name="">
             <a:extLst xmlns:a="http://schemas.openxmlformats.org/drawingml/2006/main">
               <a:ext uri="{FF2B5EF4-FFF2-40B4-BE49-F238E27FC236}">
-                <a16:creationId xmlns:a16="http://schemas.microsoft.com/office/drawing/2014/main" id="{E9DA6EEB-D5F7-4390-8A90-7AD166595E6C}"/>
-              </a:ext>
-            </a:extLst>
-          </p:cNvPr>
-          <p:cNvSpPr>
-            <a:spLocks xmlns:a="http://schemas.openxmlformats.org/drawingml/2006/main" noGrp="1"/>
-          </p:cNvSpPr>
-          <p:nvPr/>
-        </p:nvSpPr>
-        <p:spPr>
-          <a:xfrm xmlns:a="http://schemas.openxmlformats.org/drawingml/2006/main">
-            <a:off x="1000125" y="4476750"/>
-            <a:ext cx="476250" cy="476250"/>
-          </a:xfrm>
-          <a:prstGeom xmlns:a="http://schemas.openxmlformats.org/drawingml/2006/main" prst="ellipse">
+                <a16:creationId xmlns:a16="http://schemas.microsoft.com/office/drawing/2014/main" id="{2B237991-9476-4576-BE78-1463080AC081}"/>
+              </a:ext>
+            </a:extLst>
+          </p:cNvPr>
+          <p:cNvSpPr>
+            <a:spLocks xmlns:a="http://schemas.openxmlformats.org/drawingml/2006/main" noGrp="1"/>
+          </p:cNvSpPr>
+          <p:nvPr/>
+        </p:nvSpPr>
+        <p:spPr>
+          <a:xfrm xmlns:a="http://schemas.openxmlformats.org/drawingml/2006/main">
+            <a:off x="1714500" y="4181475"/>
+            <a:ext cx="9334500" cy="9525"/>
+          </a:xfrm>
+          <a:prstGeom xmlns:a="http://schemas.openxmlformats.org/drawingml/2006/main" prst="rect">
             <a:avLst/>
           </a:prstGeom>
           <a:solidFill xmlns:a="http://schemas.openxmlformats.org/drawingml/2006/main">
-            <a:srgbClr val="2C6E73"/>
+            <a:srgbClr val="D9E0E6"/>
           </a:solidFill>
           <a:ln xmlns:a="http://schemas.openxmlformats.org/drawingml/2006/main" w="0">
-            <a:noFill/>
+            <a:solidFill>
+              <a:srgbClr val="D9E0E6"/>
+            </a:solidFill>
           </a:ln>
         </p:spPr>
       </p:sp>
@@ -8729,19 +8737,19 @@
           <p:cNvPr id="21" name="">
             <a:extLst xmlns:a="http://schemas.openxmlformats.org/drawingml/2006/main">
               <a:ext uri="{FF2B5EF4-FFF2-40B4-BE49-F238E27FC236}">
-                <a16:creationId xmlns:a16="http://schemas.microsoft.com/office/drawing/2014/main" id="{02C90EBE-E1FB-494D-AD1F-C0E3CB0BCF2D}"/>
-              </a:ext>
-            </a:extLst>
-          </p:cNvPr>
-          <p:cNvSpPr>
-            <a:spLocks xmlns:a="http://schemas.openxmlformats.org/drawingml/2006/main" noGrp="1"/>
-          </p:cNvSpPr>
-          <p:nvPr/>
-        </p:nvSpPr>
-        <p:spPr>
-          <a:xfrm xmlns:a="http://schemas.openxmlformats.org/drawingml/2006/main">
-            <a:off x="1000125" y="4505325"/>
-            <a:ext cx="476250" cy="419100"/>
+                <a16:creationId xmlns:a16="http://schemas.microsoft.com/office/drawing/2014/main" id="{0BC3557A-2B97-4A80-B0FC-07AC8A870B4D}"/>
+              </a:ext>
+            </a:extLst>
+          </p:cNvPr>
+          <p:cNvSpPr>
+            <a:spLocks xmlns:a="http://schemas.openxmlformats.org/drawingml/2006/main" noGrp="1"/>
+          </p:cNvSpPr>
+          <p:nvPr/>
+        </p:nvSpPr>
+        <p:spPr>
+          <a:xfrm xmlns:a="http://schemas.openxmlformats.org/drawingml/2006/main">
+            <a:off x="1162050" y="4314825"/>
+            <a:ext cx="400050" cy="400050"/>
           </a:xfrm>
           <a:prstGeom xmlns:a="http://schemas.openxmlformats.org/drawingml/2006/main" prst="rect">
             <a:avLst/>
@@ -8758,9 +8766,9 @@
           <a:lstStyle xmlns:a="http://schemas.openxmlformats.org/drawingml/2006/main"/>
           <a:p xmlns:a="http://schemas.openxmlformats.org/drawingml/2006/main">
             <a:pPr algn="ctr">
-              <a:defRPr sz="1350" b="1">
-                <a:solidFill>
-                  <a:srgbClr val="FFFFFF"/>
+              <a:defRPr sz="1125" b="1">
+                <a:solidFill>
+                  <a:srgbClr val="2C6E73"/>
                 </a:solidFill>
                 <a:latin typeface="Arial"/>
                 <a:ea typeface="Arial"/>
@@ -8768,9 +8776,9 @@
               </a:defRPr>
             </a:pPr>
             <a:r>
-              <a:rPr sz="1350" b="1">
-                <a:solidFill>
-                  <a:srgbClr val="FFFFFF"/>
+              <a:rPr sz="1125" b="1">
+                <a:solidFill>
+                  <a:srgbClr val="2C6E73"/>
                 </a:solidFill>
                 <a:latin typeface="Arial"/>
                 <a:ea typeface="Arial"/>
@@ -8786,19 +8794,19 @@
           <p:cNvPr id="22" name="">
             <a:extLst xmlns:a="http://schemas.openxmlformats.org/drawingml/2006/main">
               <a:ext uri="{FF2B5EF4-FFF2-40B4-BE49-F238E27FC236}">
-                <a16:creationId xmlns:a16="http://schemas.microsoft.com/office/drawing/2014/main" id="{E6071F8C-1824-4D07-9069-3F961D32F4B4}"/>
-              </a:ext>
-            </a:extLst>
-          </p:cNvPr>
-          <p:cNvSpPr>
-            <a:spLocks xmlns:a="http://schemas.openxmlformats.org/drawingml/2006/main" noGrp="1"/>
-          </p:cNvSpPr>
-          <p:nvPr/>
-        </p:nvSpPr>
-        <p:spPr>
-          <a:xfrm xmlns:a="http://schemas.openxmlformats.org/drawingml/2006/main">
-            <a:off x="1714500" y="4410075"/>
-            <a:ext cx="9429750" cy="609600"/>
+                <a16:creationId xmlns:a16="http://schemas.microsoft.com/office/drawing/2014/main" id="{EAC0A7F2-3F7A-4CAD-A40F-03BA6FBA5AAA}"/>
+              </a:ext>
+            </a:extLst>
+          </p:cNvPr>
+          <p:cNvSpPr>
+            <a:spLocks xmlns:a="http://schemas.openxmlformats.org/drawingml/2006/main" noGrp="1"/>
+          </p:cNvSpPr>
+          <p:nvPr/>
+        </p:nvSpPr>
+        <p:spPr>
+          <a:xfrm xmlns:a="http://schemas.openxmlformats.org/drawingml/2006/main">
+            <a:off x="1714500" y="4229100"/>
+            <a:ext cx="9525000" cy="638175"/>
           </a:xfrm>
           <a:prstGeom xmlns:a="http://schemas.openxmlformats.org/drawingml/2006/main" prst="rect">
             <a:avLst/>
@@ -8815,9 +8823,9 @@
           <a:lstStyle xmlns:a="http://schemas.openxmlformats.org/drawingml/2006/main"/>
           <a:p xmlns:a="http://schemas.openxmlformats.org/drawingml/2006/main">
             <a:pPr algn="l">
-              <a:defRPr sz="1500" b="1">
-                <a:solidFill>
-                  <a:srgbClr val="2F785D"/>
+              <a:defRPr sz="1575" b="0">
+                <a:solidFill>
+                  <a:srgbClr val="17253A"/>
                 </a:solidFill>
                 <a:latin typeface="Arial"/>
                 <a:ea typeface="Arial"/>
@@ -8825,15 +8833,161 @@
               </a:defRPr>
             </a:pPr>
             <a:r>
-              <a:rPr sz="1500" b="1">
+              <a:rPr sz="1575" b="0">
+                <a:solidFill>
+                  <a:srgbClr val="17253A"/>
+                </a:solidFill>
+                <a:latin typeface="Arial"/>
+                <a:ea typeface="Arial"/>
+                <a:cs typeface="Arial"/>
+              </a:rPr>
+              <a:t>4,992 + 24,960</a:t>
+            </a:r>
+          </a:p>
+        </p:txBody>
+      </p:sp>
+      <p:sp>
+        <p:nvSpPr>
+          <p:cNvPr id="23" name="">
+            <a:extLst xmlns:a="http://schemas.openxmlformats.org/drawingml/2006/main">
+              <a:ext uri="{FF2B5EF4-FFF2-40B4-BE49-F238E27FC236}">
+                <a16:creationId xmlns:a16="http://schemas.microsoft.com/office/drawing/2014/main" id="{CB292703-0689-437A-8D6D-9FF2EA7D6B10}"/>
+              </a:ext>
+            </a:extLst>
+          </p:cNvPr>
+          <p:cNvSpPr>
+            <a:spLocks xmlns:a="http://schemas.openxmlformats.org/drawingml/2006/main" noGrp="1"/>
+          </p:cNvSpPr>
+          <p:nvPr/>
+        </p:nvSpPr>
+        <p:spPr>
+          <a:xfrm xmlns:a="http://schemas.openxmlformats.org/drawingml/2006/main">
+            <a:off x="1714500" y="4886325"/>
+            <a:ext cx="9334500" cy="9525"/>
+          </a:xfrm>
+          <a:prstGeom xmlns:a="http://schemas.openxmlformats.org/drawingml/2006/main" prst="rect">
+            <a:avLst/>
+          </a:prstGeom>
+          <a:solidFill xmlns:a="http://schemas.openxmlformats.org/drawingml/2006/main">
+            <a:srgbClr val="D9E0E6"/>
+          </a:solidFill>
+          <a:ln xmlns:a="http://schemas.openxmlformats.org/drawingml/2006/main" w="0">
+            <a:solidFill>
+              <a:srgbClr val="D9E0E6"/>
+            </a:solidFill>
+          </a:ln>
+        </p:spPr>
+      </p:sp>
+      <p:sp>
+        <p:nvSpPr>
+          <p:cNvPr id="24" name="">
+            <a:extLst xmlns:a="http://schemas.openxmlformats.org/drawingml/2006/main">
+              <a:ext uri="{FF2B5EF4-FFF2-40B4-BE49-F238E27FC236}">
+                <a16:creationId xmlns:a16="http://schemas.microsoft.com/office/drawing/2014/main" id="{723ABE1E-58BD-4C79-85C9-BC8C506117CD}"/>
+              </a:ext>
+            </a:extLst>
+          </p:cNvPr>
+          <p:cNvSpPr>
+            <a:spLocks xmlns:a="http://schemas.openxmlformats.org/drawingml/2006/main" noGrp="1"/>
+          </p:cNvSpPr>
+          <p:nvPr/>
+        </p:nvSpPr>
+        <p:spPr>
+          <a:xfrm xmlns:a="http://schemas.openxmlformats.org/drawingml/2006/main">
+            <a:off x="1162050" y="5019675"/>
+            <a:ext cx="400050" cy="400050"/>
+          </a:xfrm>
+          <a:prstGeom xmlns:a="http://schemas.openxmlformats.org/drawingml/2006/main" prst="rect">
+            <a:avLst/>
+          </a:prstGeom>
+          <a:noFill xmlns:a="http://schemas.openxmlformats.org/drawingml/2006/main"/>
+          <a:ln xmlns:a="http://schemas.openxmlformats.org/drawingml/2006/main" w="0">
+            <a:noFill/>
+          </a:ln>
+        </p:spPr>
+        <p:txBody>
+          <a:bodyPr xmlns:a="http://schemas.openxmlformats.org/drawingml/2006/main" anchor="ctr">
+            <a:normAutofit fontScale="100000"/>
+          </a:bodyPr>
+          <a:lstStyle xmlns:a="http://schemas.openxmlformats.org/drawingml/2006/main"/>
+          <a:p xmlns:a="http://schemas.openxmlformats.org/drawingml/2006/main">
+            <a:pPr algn="ctr">
+              <a:defRPr sz="1125" b="1">
                 <a:solidFill>
                   <a:srgbClr val="2F785D"/>
                 </a:solidFill>
                 <a:latin typeface="Arial"/>
                 <a:ea typeface="Arial"/>
                 <a:cs typeface="Arial"/>
+              </a:defRPr>
+            </a:pPr>
+            <a:r>
+              <a:rPr sz="1125" b="1">
+                <a:solidFill>
+                  <a:srgbClr val="2F785D"/>
+                </a:solidFill>
+                <a:latin typeface="Arial"/>
+                <a:ea typeface="Arial"/>
+                <a:cs typeface="Arial"/>
               </a:rPr>
-              <a:t>Check the result: Add the partial products and compare the answer with the estimate.</a:t>
+              <a:t>5</a:t>
+            </a:r>
+          </a:p>
+        </p:txBody>
+      </p:sp>
+      <p:sp>
+        <p:nvSpPr>
+          <p:cNvPr id="25" name="">
+            <a:extLst xmlns:a="http://schemas.openxmlformats.org/drawingml/2006/main">
+              <a:ext uri="{FF2B5EF4-FFF2-40B4-BE49-F238E27FC236}">
+                <a16:creationId xmlns:a16="http://schemas.microsoft.com/office/drawing/2014/main" id="{432CBA30-F105-42D6-86D7-BFB63C3471A5}"/>
+              </a:ext>
+            </a:extLst>
+          </p:cNvPr>
+          <p:cNvSpPr>
+            <a:spLocks xmlns:a="http://schemas.openxmlformats.org/drawingml/2006/main" noGrp="1"/>
+          </p:cNvSpPr>
+          <p:nvPr/>
+        </p:nvSpPr>
+        <p:spPr>
+          <a:xfrm xmlns:a="http://schemas.openxmlformats.org/drawingml/2006/main">
+            <a:off x="1714500" y="4933950"/>
+            <a:ext cx="9525000" cy="638175"/>
+          </a:xfrm>
+          <a:prstGeom xmlns:a="http://schemas.openxmlformats.org/drawingml/2006/main" prst="rect">
+            <a:avLst/>
+          </a:prstGeom>
+          <a:noFill xmlns:a="http://schemas.openxmlformats.org/drawingml/2006/main"/>
+          <a:ln xmlns:a="http://schemas.openxmlformats.org/drawingml/2006/main" w="0">
+            <a:noFill/>
+          </a:ln>
+        </p:spPr>
+        <p:txBody>
+          <a:bodyPr xmlns:a="http://schemas.openxmlformats.org/drawingml/2006/main" anchor="ctr">
+            <a:normAutofit fontScale="100000"/>
+          </a:bodyPr>
+          <a:lstStyle xmlns:a="http://schemas.openxmlformats.org/drawingml/2006/main"/>
+          <a:p xmlns:a="http://schemas.openxmlformats.org/drawingml/2006/main">
+            <a:pPr algn="l">
+              <a:defRPr sz="1575" b="1">
+                <a:solidFill>
+                  <a:srgbClr val="2F785D"/>
+                </a:solidFill>
+                <a:latin typeface="Arial"/>
+                <a:ea typeface="Arial"/>
+                <a:cs typeface="Arial"/>
+              </a:defRPr>
+            </a:pPr>
+            <a:r>
+              <a:rPr sz="1575" b="1">
+                <a:solidFill>
+                  <a:srgbClr val="2F785D"/>
+                </a:solidFill>
+                <a:latin typeface="Arial"/>
+                <a:ea typeface="Arial"/>
+                <a:cs typeface="Arial"/>
+              </a:rPr>
+              <a:t>29,952 seats</a:t>
             </a:r>
           </a:p>
         </p:txBody>
@@ -8841,7 +8995,7 @@
     </p:spTree>
     <p:extLst>
       <p:ext uri="{BB962C8B-B14F-4D97-AF65-F5344CB8AC3E}">
-        <p14:creationId xmlns:p14="http://schemas.microsoft.com/office/powerpoint/2010/main" val="15242277"/>
+        <p14:creationId xmlns:p14="http://schemas.microsoft.com/office/powerpoint/2010/main" val="1960641505"/>
       </p:ext>
     </p:extLst>
   </p:cSld>
@@ -9078,6 +9232,51 @@
                       </p:childTnLst>
                     </p:cTn>
                   </p:par>
+                  <p:par>
+                    <p:cTn id="23" fill="hold">
+                      <p:stCondLst>
+                        <p:cond delay="indefinite"/>
+                      </p:stCondLst>
+                      <p:childTnLst>
+                        <p:par>
+                          <p:cTn id="24" fill="hold">
+                            <p:stCondLst>
+                              <p:cond delay="0"/>
+                            </p:stCondLst>
+                            <p:childTnLst>
+                              <p:par>
+                                <p:cTn id="25" presetID="1" presetClass="entr" presetSubtype="0" fill="hold" grpId="0" nodeType="clickEffect">
+                                  <p:stCondLst>
+                                    <p:cond delay="0"/>
+                                  </p:stCondLst>
+                                  <p:childTnLst>
+                                    <p:set>
+                                      <p:cBhvr>
+                                        <p:cTn id="26" dur="1" fill="hold">
+                                          <p:stCondLst>
+                                            <p:cond delay="0"/>
+                                          </p:stCondLst>
+                                        </p:cTn>
+                                        <p:tgtEl>
+                                          <p:spTgt spid="25"/>
+                                        </p:tgtEl>
+                                        <p:attrNameLst>
+                                          <p:attrName>style.visibility</p:attrName>
+                                        </p:attrNameLst>
+                                      </p:cBhvr>
+                                      <p:to>
+                                        <p:strVal val="visible"/>
+                                      </p:to>
+                                    </p:set>
+                                  </p:childTnLst>
+                                </p:cTn>
+                              </p:par>
+                            </p:childTnLst>
+                          </p:cTn>
+                        </p:par>
+                      </p:childTnLst>
+                    </p:cTn>
+                  </p:par>
                 </p:childTnLst>
               </p:cTn>
               <p:prevCondLst>
@@ -9105,6 +9304,7 @@
       <p:bldP spid="16" grpId="0"/>
       <p:bldP spid="19" grpId="0"/>
       <p:bldP spid="22" grpId="0"/>
+      <p:bldP spid="25" grpId="0"/>
     </p:bldLst>
   </p:timing>
 </p:sld>
@@ -9134,7 +9334,7 @@
           <p:cNvPr id="15" name="">
             <a:extLst xmlns:a="http://schemas.openxmlformats.org/drawingml/2006/main">
               <a:ext uri="{FF2B5EF4-FFF2-40B4-BE49-F238E27FC236}">
-                <a16:creationId xmlns:a16="http://schemas.microsoft.com/office/drawing/2014/main" id="{CF143FA2-9933-46D1-9942-AD9C1EB343B1}"/>
+                <a16:creationId xmlns:a16="http://schemas.microsoft.com/office/drawing/2014/main" id="{3B2046A9-3D9C-4D67-9137-1A13BFE52DC8}"/>
               </a:ext>
             </a:extLst>
           </p:cNvPr>
@@ -9166,7 +9366,7 @@
           <p:cNvPr id="2" name="">
             <a:extLst xmlns:a="http://schemas.openxmlformats.org/drawingml/2006/main">
               <a:ext uri="{FF2B5EF4-FFF2-40B4-BE49-F238E27FC236}">
-                <a16:creationId xmlns:a16="http://schemas.microsoft.com/office/drawing/2014/main" id="{EB51731B-8C3D-4B16-BD2F-03F0DE0B81A1}"/>
+                <a16:creationId xmlns:a16="http://schemas.microsoft.com/office/drawing/2014/main" id="{5601A124-EF27-400C-B7A4-310125B927C6}"/>
               </a:ext>
             </a:extLst>
           </p:cNvPr>
@@ -9223,7 +9423,7 @@
           <p:cNvPr id="3" name="">
             <a:extLst xmlns:a="http://schemas.openxmlformats.org/drawingml/2006/main">
               <a:ext uri="{FF2B5EF4-FFF2-40B4-BE49-F238E27FC236}">
-                <a16:creationId xmlns:a16="http://schemas.microsoft.com/office/drawing/2014/main" id="{3BC5083F-BAE1-4F28-A7C0-03DD4EB00102}"/>
+                <a16:creationId xmlns:a16="http://schemas.microsoft.com/office/drawing/2014/main" id="{F85B6431-FA09-4980-B4AD-D3118B8CA5A2}"/>
               </a:ext>
             </a:extLst>
           </p:cNvPr>
@@ -9255,7 +9455,7 @@
           <p:cNvPr id="4" name="">
             <a:extLst xmlns:a="http://schemas.openxmlformats.org/drawingml/2006/main">
               <a:ext uri="{FF2B5EF4-FFF2-40B4-BE49-F238E27FC236}">
-                <a16:creationId xmlns:a16="http://schemas.microsoft.com/office/drawing/2014/main" id="{E8971DD3-AA25-414F-96C1-2B277654D582}"/>
+                <a16:creationId xmlns:a16="http://schemas.microsoft.com/office/drawing/2014/main" id="{F5840F85-EEB9-4E0A-AE2D-89775973E056}"/>
               </a:ext>
             </a:extLst>
           </p:cNvPr>
@@ -9312,7 +9512,7 @@
           <p:cNvPr id="5" name="">
             <a:extLst xmlns:a="http://schemas.openxmlformats.org/drawingml/2006/main">
               <a:ext uri="{FF2B5EF4-FFF2-40B4-BE49-F238E27FC236}">
-                <a16:creationId xmlns:a16="http://schemas.microsoft.com/office/drawing/2014/main" id="{FB2D4759-6565-4020-B686-E432EB36F3EC}"/>
+                <a16:creationId xmlns:a16="http://schemas.microsoft.com/office/drawing/2014/main" id="{6E34EA78-D76F-4038-9DDF-3D68E8BE64D5}"/>
               </a:ext>
             </a:extLst>
           </p:cNvPr>
@@ -9369,7 +9569,7 @@
           <p:cNvPr id="6" name="">
             <a:extLst xmlns:a="http://schemas.openxmlformats.org/drawingml/2006/main">
               <a:ext uri="{FF2B5EF4-FFF2-40B4-BE49-F238E27FC236}">
-                <a16:creationId xmlns:a16="http://schemas.microsoft.com/office/drawing/2014/main" id="{9D33D23B-4967-4E9C-B574-BEA3D2EB2C01}"/>
+                <a16:creationId xmlns:a16="http://schemas.microsoft.com/office/drawing/2014/main" id="{CCEC02BF-6C64-46BE-8F6E-913EB1DAEED0}"/>
               </a:ext>
             </a:extLst>
           </p:cNvPr>
@@ -9426,7 +9626,7 @@
           <p:cNvPr id="7" name="">
             <a:extLst xmlns:a="http://schemas.openxmlformats.org/drawingml/2006/main">
               <a:ext uri="{FF2B5EF4-FFF2-40B4-BE49-F238E27FC236}">
-                <a16:creationId xmlns:a16="http://schemas.microsoft.com/office/drawing/2014/main" id="{1864CFAD-4C0E-4B2D-9247-B5EF9EC0B60F}"/>
+                <a16:creationId xmlns:a16="http://schemas.microsoft.com/office/drawing/2014/main" id="{285DF073-4BD7-4881-A2F0-7A32D1A45351}"/>
               </a:ext>
             </a:extLst>
           </p:cNvPr>
@@ -9458,7 +9658,7 @@
           <p:cNvPr id="8" name="">
             <a:extLst xmlns:a="http://schemas.openxmlformats.org/drawingml/2006/main">
               <a:ext uri="{FF2B5EF4-FFF2-40B4-BE49-F238E27FC236}">
-                <a16:creationId xmlns:a16="http://schemas.microsoft.com/office/drawing/2014/main" id="{7B9EFAFD-0D3D-49C9-80E8-9D0A4EC40C9B}"/>
+                <a16:creationId xmlns:a16="http://schemas.microsoft.com/office/drawing/2014/main" id="{BF5405CA-2764-43C6-A382-161812D99DC9}"/>
               </a:ext>
             </a:extLst>
           </p:cNvPr>
@@ -9515,7 +9715,7 @@
           <p:cNvPr id="9" name="">
             <a:extLst xmlns:a="http://schemas.openxmlformats.org/drawingml/2006/main">
               <a:ext uri="{FF2B5EF4-FFF2-40B4-BE49-F238E27FC236}">
-                <a16:creationId xmlns:a16="http://schemas.microsoft.com/office/drawing/2014/main" id="{FA9DCC54-527D-4652-B502-5000C3236DAD}"/>
+                <a16:creationId xmlns:a16="http://schemas.microsoft.com/office/drawing/2014/main" id="{1FA02627-1AB1-4A0B-A62D-9DDE3ACFC485}"/>
               </a:ext>
             </a:extLst>
           </p:cNvPr>
@@ -9572,7 +9772,7 @@
           <p:cNvPr id="10" name="">
             <a:extLst xmlns:a="http://schemas.openxmlformats.org/drawingml/2006/main">
               <a:ext uri="{FF2B5EF4-FFF2-40B4-BE49-F238E27FC236}">
-                <a16:creationId xmlns:a16="http://schemas.microsoft.com/office/drawing/2014/main" id="{C70849A3-7157-44D1-B7E2-B76301A829C3}"/>
+                <a16:creationId xmlns:a16="http://schemas.microsoft.com/office/drawing/2014/main" id="{56DD4D60-47F7-4F14-8E4C-36557621BF93}"/>
               </a:ext>
             </a:extLst>
           </p:cNvPr>
@@ -9629,7 +9829,7 @@
           <p:cNvPr id="11" name="">
             <a:extLst xmlns:a="http://schemas.openxmlformats.org/drawingml/2006/main">
               <a:ext uri="{FF2B5EF4-FFF2-40B4-BE49-F238E27FC236}">
-                <a16:creationId xmlns:a16="http://schemas.microsoft.com/office/drawing/2014/main" id="{4458358F-2755-4897-A18A-C253198530F2}"/>
+                <a16:creationId xmlns:a16="http://schemas.microsoft.com/office/drawing/2014/main" id="{E63D6B07-9B5A-45B6-A40C-F88CDB2F762A}"/>
               </a:ext>
             </a:extLst>
           </p:cNvPr>
@@ -9686,7 +9886,7 @@
           <p:cNvPr id="12" name="">
             <a:extLst xmlns:a="http://schemas.openxmlformats.org/drawingml/2006/main">
               <a:ext uri="{FF2B5EF4-FFF2-40B4-BE49-F238E27FC236}">
-                <a16:creationId xmlns:a16="http://schemas.microsoft.com/office/drawing/2014/main" id="{FE9991C7-6642-4D80-8DDC-FDBDEC3F3616}"/>
+                <a16:creationId xmlns:a16="http://schemas.microsoft.com/office/drawing/2014/main" id="{015A2770-806A-4F26-B4DB-18E4F6B7DCA1}"/>
               </a:ext>
             </a:extLst>
           </p:cNvPr>
@@ -9718,7 +9918,7 @@
           <p:cNvPr id="13" name="">
             <a:extLst xmlns:a="http://schemas.openxmlformats.org/drawingml/2006/main">
               <a:ext uri="{FF2B5EF4-FFF2-40B4-BE49-F238E27FC236}">
-                <a16:creationId xmlns:a16="http://schemas.microsoft.com/office/drawing/2014/main" id="{9831AE36-DAAA-4880-94DD-DDA2BE91D6D7}"/>
+                <a16:creationId xmlns:a16="http://schemas.microsoft.com/office/drawing/2014/main" id="{8ECFE8D7-748B-43FB-986C-77A0852CE7E5}"/>
               </a:ext>
             </a:extLst>
           </p:cNvPr>
@@ -9775,7 +9975,7 @@
           <p:cNvPr id="14" name="">
             <a:extLst xmlns:a="http://schemas.openxmlformats.org/drawingml/2006/main">
               <a:ext uri="{FF2B5EF4-FFF2-40B4-BE49-F238E27FC236}">
-                <a16:creationId xmlns:a16="http://schemas.microsoft.com/office/drawing/2014/main" id="{9E2B28A0-86E4-45AA-8741-8C68A389DF39}"/>
+                <a16:creationId xmlns:a16="http://schemas.microsoft.com/office/drawing/2014/main" id="{F83A5B58-67EF-45D5-AE87-02B660FAB1A5}"/>
               </a:ext>
             </a:extLst>
           </p:cNvPr>
@@ -9830,7 +10030,7 @@
     </p:spTree>
     <p:extLst>
       <p:ext uri="{BB962C8B-B14F-4D97-AF65-F5344CB8AC3E}">
-        <p14:creationId xmlns:p14="http://schemas.microsoft.com/office/powerpoint/2010/main" val="1467328990"/>
+        <p14:creationId xmlns:p14="http://schemas.microsoft.com/office/powerpoint/2010/main" val="1953133629"/>
       </p:ext>
     </p:extLst>
   </p:cSld>
@@ -10031,7 +10231,7 @@
           <p:cNvPr id="16" name="">
             <a:extLst xmlns:a="http://schemas.openxmlformats.org/drawingml/2006/main">
               <a:ext uri="{FF2B5EF4-FFF2-40B4-BE49-F238E27FC236}">
-                <a16:creationId xmlns:a16="http://schemas.microsoft.com/office/drawing/2014/main" id="{E367D849-DA8D-4854-BDB7-CA8062DC5366}"/>
+                <a16:creationId xmlns:a16="http://schemas.microsoft.com/office/drawing/2014/main" id="{9223ED8E-0440-48BE-9ECD-2DCE5D767301}"/>
               </a:ext>
             </a:extLst>
           </p:cNvPr>
@@ -10063,7 +10263,7 @@
           <p:cNvPr id="2" name="">
             <a:extLst xmlns:a="http://schemas.openxmlformats.org/drawingml/2006/main">
               <a:ext uri="{FF2B5EF4-FFF2-40B4-BE49-F238E27FC236}">
-                <a16:creationId xmlns:a16="http://schemas.microsoft.com/office/drawing/2014/main" id="{EED6D37D-0EBD-4F88-8399-96A84D04A276}"/>
+                <a16:creationId xmlns:a16="http://schemas.microsoft.com/office/drawing/2014/main" id="{EBE3AFAF-CADB-40FF-9A79-F185E2AF833F}"/>
               </a:ext>
             </a:extLst>
           </p:cNvPr>
@@ -10120,7 +10320,7 @@
           <p:cNvPr id="3" name="">
             <a:extLst xmlns:a="http://schemas.openxmlformats.org/drawingml/2006/main">
               <a:ext uri="{FF2B5EF4-FFF2-40B4-BE49-F238E27FC236}">
-                <a16:creationId xmlns:a16="http://schemas.microsoft.com/office/drawing/2014/main" id="{AF1FE0D2-7947-473E-885A-1941A50C7D45}"/>
+                <a16:creationId xmlns:a16="http://schemas.microsoft.com/office/drawing/2014/main" id="{724CD0B6-2FB2-41A7-8370-6E385A88F0DB}"/>
               </a:ext>
             </a:extLst>
           </p:cNvPr>
@@ -10152,7 +10352,7 @@
           <p:cNvPr id="4" name="">
             <a:extLst xmlns:a="http://schemas.openxmlformats.org/drawingml/2006/main">
               <a:ext uri="{FF2B5EF4-FFF2-40B4-BE49-F238E27FC236}">
-                <a16:creationId xmlns:a16="http://schemas.microsoft.com/office/drawing/2014/main" id="{FBB8285D-82E8-41BD-99FA-DB37A167D5FE}"/>
+                <a16:creationId xmlns:a16="http://schemas.microsoft.com/office/drawing/2014/main" id="{F1BB58C1-8F39-4E9B-92F1-B6D5F6AA7F1A}"/>
               </a:ext>
             </a:extLst>
           </p:cNvPr>
@@ -10209,7 +10409,7 @@
           <p:cNvPr id="5" name="">
             <a:extLst xmlns:a="http://schemas.openxmlformats.org/drawingml/2006/main">
               <a:ext uri="{FF2B5EF4-FFF2-40B4-BE49-F238E27FC236}">
-                <a16:creationId xmlns:a16="http://schemas.microsoft.com/office/drawing/2014/main" id="{86442091-5DF2-4DA0-B9C7-1DCDD62CEEAD}"/>
+                <a16:creationId xmlns:a16="http://schemas.microsoft.com/office/drawing/2014/main" id="{1E826F94-BFCC-458E-9576-3161DA775BC4}"/>
               </a:ext>
             </a:extLst>
           </p:cNvPr>
@@ -10266,7 +10466,7 @@
           <p:cNvPr id="6" name="">
             <a:extLst xmlns:a="http://schemas.openxmlformats.org/drawingml/2006/main">
               <a:ext uri="{FF2B5EF4-FFF2-40B4-BE49-F238E27FC236}">
-                <a16:creationId xmlns:a16="http://schemas.microsoft.com/office/drawing/2014/main" id="{0A6D6EBE-F692-47E7-9B1B-B9322416D57B}"/>
+                <a16:creationId xmlns:a16="http://schemas.microsoft.com/office/drawing/2014/main" id="{C179F368-B077-49C0-92BC-5136BC5C3FD8}"/>
               </a:ext>
             </a:extLst>
           </p:cNvPr>
@@ -10323,7 +10523,7 @@
           <p:cNvPr id="7" name="">
             <a:extLst xmlns:a="http://schemas.openxmlformats.org/drawingml/2006/main">
               <a:ext uri="{FF2B5EF4-FFF2-40B4-BE49-F238E27FC236}">
-                <a16:creationId xmlns:a16="http://schemas.microsoft.com/office/drawing/2014/main" id="{8EABBF2D-D69F-4079-B5C7-C9D1DFD7CEE8}"/>
+                <a16:creationId xmlns:a16="http://schemas.microsoft.com/office/drawing/2014/main" id="{81F0866B-876A-4344-8C24-84F7216A1B27}"/>
               </a:ext>
             </a:extLst>
           </p:cNvPr>
@@ -10355,7 +10555,7 @@
           <p:cNvPr id="8" name="">
             <a:extLst xmlns:a="http://schemas.openxmlformats.org/drawingml/2006/main">
               <a:ext uri="{FF2B5EF4-FFF2-40B4-BE49-F238E27FC236}">
-                <a16:creationId xmlns:a16="http://schemas.microsoft.com/office/drawing/2014/main" id="{C77578C6-0339-4980-B099-CCF4A57DEB02}"/>
+                <a16:creationId xmlns:a16="http://schemas.microsoft.com/office/drawing/2014/main" id="{6DF1FF01-BB04-4178-8EFA-8B3F796AB5B2}"/>
               </a:ext>
             </a:extLst>
           </p:cNvPr>
@@ -10412,7 +10612,7 @@
           <p:cNvPr id="9" name="">
             <a:extLst xmlns:a="http://schemas.openxmlformats.org/drawingml/2006/main">
               <a:ext uri="{FF2B5EF4-FFF2-40B4-BE49-F238E27FC236}">
-                <a16:creationId xmlns:a16="http://schemas.microsoft.com/office/drawing/2014/main" id="{9B9CB5C1-CA73-4757-A654-8FB06D433A3A}"/>
+                <a16:creationId xmlns:a16="http://schemas.microsoft.com/office/drawing/2014/main" id="{FEC0250A-7421-42FB-9753-77E45A31A53F}"/>
               </a:ext>
             </a:extLst>
           </p:cNvPr>
@@ -10469,7 +10669,7 @@
           <p:cNvPr id="10" name="">
             <a:extLst xmlns:a="http://schemas.openxmlformats.org/drawingml/2006/main">
               <a:ext uri="{FF2B5EF4-FFF2-40B4-BE49-F238E27FC236}">
-                <a16:creationId xmlns:a16="http://schemas.microsoft.com/office/drawing/2014/main" id="{FB439FFF-6E0D-48D8-BB92-CC051EC3FA73}"/>
+                <a16:creationId xmlns:a16="http://schemas.microsoft.com/office/drawing/2014/main" id="{DB9017C1-F864-49DE-92C6-ED8EE0CB94A5}"/>
               </a:ext>
             </a:extLst>
           </p:cNvPr>
@@ -10526,7 +10726,7 @@
           <p:cNvPr id="11" name="">
             <a:extLst xmlns:a="http://schemas.openxmlformats.org/drawingml/2006/main">
               <a:ext uri="{FF2B5EF4-FFF2-40B4-BE49-F238E27FC236}">
-                <a16:creationId xmlns:a16="http://schemas.microsoft.com/office/drawing/2014/main" id="{13CF751E-A4BD-4A2F-8E4B-0E0ADCE0207E}"/>
+                <a16:creationId xmlns:a16="http://schemas.microsoft.com/office/drawing/2014/main" id="{6E9AF564-25F4-464C-BFD5-7586A6CA389F}"/>
               </a:ext>
             </a:extLst>
           </p:cNvPr>
@@ -10583,7 +10783,7 @@
           <p:cNvPr id="12" name="">
             <a:extLst xmlns:a="http://schemas.openxmlformats.org/drawingml/2006/main">
               <a:ext uri="{FF2B5EF4-FFF2-40B4-BE49-F238E27FC236}">
-                <a16:creationId xmlns:a16="http://schemas.microsoft.com/office/drawing/2014/main" id="{80DA53D6-F53B-4F48-B8DE-2A66130262B7}"/>
+                <a16:creationId xmlns:a16="http://schemas.microsoft.com/office/drawing/2014/main" id="{FD434D39-B66B-48FD-90E8-A101480F8B24}"/>
               </a:ext>
             </a:extLst>
           </p:cNvPr>
@@ -10640,7 +10840,7 @@
           <p:cNvPr id="13" name="">
             <a:extLst xmlns:a="http://schemas.openxmlformats.org/drawingml/2006/main">
               <a:ext uri="{FF2B5EF4-FFF2-40B4-BE49-F238E27FC236}">
-                <a16:creationId xmlns:a16="http://schemas.microsoft.com/office/drawing/2014/main" id="{598690C1-3870-4D9D-995C-2DDA178EF46C}"/>
+                <a16:creationId xmlns:a16="http://schemas.microsoft.com/office/drawing/2014/main" id="{0DC0A543-7533-4AC6-868E-7DDAFF9A6AE8}"/>
               </a:ext>
             </a:extLst>
           </p:cNvPr>
@@ -10697,7 +10897,7 @@
           <p:cNvPr id="14" name="">
             <a:extLst xmlns:a="http://schemas.openxmlformats.org/drawingml/2006/main">
               <a:ext uri="{FF2B5EF4-FFF2-40B4-BE49-F238E27FC236}">
-                <a16:creationId xmlns:a16="http://schemas.microsoft.com/office/drawing/2014/main" id="{4C331A63-DD7B-40D1-93E1-AB6D037C0A9F}"/>
+                <a16:creationId xmlns:a16="http://schemas.microsoft.com/office/drawing/2014/main" id="{07615070-A321-452C-A832-9B52B5281FA0}"/>
               </a:ext>
             </a:extLst>
           </p:cNvPr>
@@ -10754,7 +10954,7 @@
           <p:cNvPr id="15" name="">
             <a:extLst xmlns:a="http://schemas.openxmlformats.org/drawingml/2006/main">
               <a:ext uri="{FF2B5EF4-FFF2-40B4-BE49-F238E27FC236}">
-                <a16:creationId xmlns:a16="http://schemas.microsoft.com/office/drawing/2014/main" id="{8E1565D2-CCE8-4467-BD75-1B007E31E6CD}"/>
+                <a16:creationId xmlns:a16="http://schemas.microsoft.com/office/drawing/2014/main" id="{45AC5785-D656-4A81-92EA-B138D27EBA7F}"/>
               </a:ext>
             </a:extLst>
           </p:cNvPr>
@@ -10809,7 +11009,7 @@
     </p:spTree>
     <p:extLst>
       <p:ext uri="{BB962C8B-B14F-4D97-AF65-F5344CB8AC3E}">
-        <p14:creationId xmlns:p14="http://schemas.microsoft.com/office/powerpoint/2010/main" val="1567950357"/>
+        <p14:creationId xmlns:p14="http://schemas.microsoft.com/office/powerpoint/2010/main" val="87068171"/>
       </p:ext>
     </p:extLst>
   </p:cSld>
@@ -10964,7 +11164,7 @@
           <p:cNvPr id="16" name="">
             <a:extLst xmlns:a="http://schemas.openxmlformats.org/drawingml/2006/main">
               <a:ext uri="{FF2B5EF4-FFF2-40B4-BE49-F238E27FC236}">
-                <a16:creationId xmlns:a16="http://schemas.microsoft.com/office/drawing/2014/main" id="{F1CCD958-C08E-4676-A9FC-90FA17C7363E}"/>
+                <a16:creationId xmlns:a16="http://schemas.microsoft.com/office/drawing/2014/main" id="{D78121E9-BB1D-4AB6-A98B-248654860AC1}"/>
               </a:ext>
             </a:extLst>
           </p:cNvPr>
@@ -10996,7 +11196,7 @@
           <p:cNvPr id="2" name="">
             <a:extLst xmlns:a="http://schemas.openxmlformats.org/drawingml/2006/main">
               <a:ext uri="{FF2B5EF4-FFF2-40B4-BE49-F238E27FC236}">
-                <a16:creationId xmlns:a16="http://schemas.microsoft.com/office/drawing/2014/main" id="{E4B60095-1647-4B57-AA9F-35EE4C10A944}"/>
+                <a16:creationId xmlns:a16="http://schemas.microsoft.com/office/drawing/2014/main" id="{4BF707C9-D981-42C5-9DF2-8D95A39326A1}"/>
               </a:ext>
             </a:extLst>
           </p:cNvPr>
@@ -11053,7 +11253,7 @@
           <p:cNvPr id="3" name="">
             <a:extLst xmlns:a="http://schemas.openxmlformats.org/drawingml/2006/main">
               <a:ext uri="{FF2B5EF4-FFF2-40B4-BE49-F238E27FC236}">
-                <a16:creationId xmlns:a16="http://schemas.microsoft.com/office/drawing/2014/main" id="{D7999146-C340-40A8-9C75-67B23C1BE616}"/>
+                <a16:creationId xmlns:a16="http://schemas.microsoft.com/office/drawing/2014/main" id="{E5CD1E8C-7718-433B-8DBF-CB61B4931825}"/>
               </a:ext>
             </a:extLst>
           </p:cNvPr>
@@ -11085,7 +11285,7 @@
           <p:cNvPr id="4" name="">
             <a:extLst xmlns:a="http://schemas.openxmlformats.org/drawingml/2006/main">
               <a:ext uri="{FF2B5EF4-FFF2-40B4-BE49-F238E27FC236}">
-                <a16:creationId xmlns:a16="http://schemas.microsoft.com/office/drawing/2014/main" id="{B4AB5CD6-43C7-49A2-9788-5AAC9A07A45E}"/>
+                <a16:creationId xmlns:a16="http://schemas.microsoft.com/office/drawing/2014/main" id="{D12A48B6-3482-4848-93DA-BEBAD971989B}"/>
               </a:ext>
             </a:extLst>
           </p:cNvPr>
@@ -11142,7 +11342,7 @@
           <p:cNvPr id="5" name="">
             <a:extLst xmlns:a="http://schemas.openxmlformats.org/drawingml/2006/main">
               <a:ext uri="{FF2B5EF4-FFF2-40B4-BE49-F238E27FC236}">
-                <a16:creationId xmlns:a16="http://schemas.microsoft.com/office/drawing/2014/main" id="{20AFAD17-9786-40FE-8061-8879F2CF4585}"/>
+                <a16:creationId xmlns:a16="http://schemas.microsoft.com/office/drawing/2014/main" id="{D3D93AA7-D3F1-4B5E-BEB8-4EF8EE2F5BE4}"/>
               </a:ext>
             </a:extLst>
           </p:cNvPr>
@@ -11199,7 +11399,7 @@
           <p:cNvPr id="6" name="">
             <a:extLst xmlns:a="http://schemas.openxmlformats.org/drawingml/2006/main">
               <a:ext uri="{FF2B5EF4-FFF2-40B4-BE49-F238E27FC236}">
-                <a16:creationId xmlns:a16="http://schemas.microsoft.com/office/drawing/2014/main" id="{55C6D161-08B8-40B7-AB9C-A2353723A075}"/>
+                <a16:creationId xmlns:a16="http://schemas.microsoft.com/office/drawing/2014/main" id="{71F7D8FE-469C-4486-AB84-8623588530DB}"/>
               </a:ext>
             </a:extLst>
           </p:cNvPr>
@@ -11256,7 +11456,7 @@
           <p:cNvPr id="7" name="">
             <a:extLst xmlns:a="http://schemas.openxmlformats.org/drawingml/2006/main">
               <a:ext uri="{FF2B5EF4-FFF2-40B4-BE49-F238E27FC236}">
-                <a16:creationId xmlns:a16="http://schemas.microsoft.com/office/drawing/2014/main" id="{F031F784-E853-442A-A3A9-7B9C0968A3A5}"/>
+                <a16:creationId xmlns:a16="http://schemas.microsoft.com/office/drawing/2014/main" id="{85D7E07C-8804-45A1-94A6-6A69732417EF}"/>
               </a:ext>
             </a:extLst>
           </p:cNvPr>
@@ -11288,7 +11488,7 @@
           <p:cNvPr id="8" name="">
             <a:extLst xmlns:a="http://schemas.openxmlformats.org/drawingml/2006/main">
               <a:ext uri="{FF2B5EF4-FFF2-40B4-BE49-F238E27FC236}">
-                <a16:creationId xmlns:a16="http://schemas.microsoft.com/office/drawing/2014/main" id="{497A4DB8-6FB2-4605-8E8F-D2D87B9F7FB1}"/>
+                <a16:creationId xmlns:a16="http://schemas.microsoft.com/office/drawing/2014/main" id="{946ACA10-B61D-4065-8BFC-FAF8ABBB7AE9}"/>
               </a:ext>
             </a:extLst>
           </p:cNvPr>
@@ -11345,7 +11545,7 @@
           <p:cNvPr id="9" name="">
             <a:extLst xmlns:a="http://schemas.openxmlformats.org/drawingml/2006/main">
               <a:ext uri="{FF2B5EF4-FFF2-40B4-BE49-F238E27FC236}">
-                <a16:creationId xmlns:a16="http://schemas.microsoft.com/office/drawing/2014/main" id="{5148170E-4E27-40B1-A4C5-0DDF66AD72DB}"/>
+                <a16:creationId xmlns:a16="http://schemas.microsoft.com/office/drawing/2014/main" id="{78C16D5E-F12C-49A6-A3F4-ADA11D2292A7}"/>
               </a:ext>
             </a:extLst>
           </p:cNvPr>
@@ -11406,7 +11606,7 @@
           <p:nvPr/>
         </p:nvPicPr>
         <p:blipFill>
-          <a:blip xmlns:r="http://schemas.openxmlformats.org/officeDocument/2006/relationships" xmlns:a="http://schemas.openxmlformats.org/drawingml/2006/main" r:embed="R24b27378507a4eea"/>
+          <a:blip xmlns:r="http://schemas.openxmlformats.org/officeDocument/2006/relationships" xmlns:a="http://schemas.openxmlformats.org/drawingml/2006/main" r:embed="R0de815de74a24995"/>
           <a:stretch xmlns:a="http://schemas.openxmlformats.org/drawingml/2006/main"/>
         </p:blipFill>
         <p:spPr>
@@ -11424,7 +11624,7 @@
           <p:cNvPr id="11" name="">
             <a:extLst xmlns:a="http://schemas.openxmlformats.org/drawingml/2006/main">
               <a:ext uri="{FF2B5EF4-FFF2-40B4-BE49-F238E27FC236}">
-                <a16:creationId xmlns:a16="http://schemas.microsoft.com/office/drawing/2014/main" id="{C1D9F2F2-2CC1-4464-8F48-48DB56E0ADC7}"/>
+                <a16:creationId xmlns:a16="http://schemas.microsoft.com/office/drawing/2014/main" id="{525E7A67-9772-4790-B2B7-0D080D389CE2}"/>
               </a:ext>
             </a:extLst>
           </p:cNvPr>
@@ -11481,7 +11681,7 @@
           <p:cNvPr id="12" name="">
             <a:extLst xmlns:a="http://schemas.openxmlformats.org/drawingml/2006/main">
               <a:ext uri="{FF2B5EF4-FFF2-40B4-BE49-F238E27FC236}">
-                <a16:creationId xmlns:a16="http://schemas.microsoft.com/office/drawing/2014/main" id="{2EFF135A-BFEA-4B64-BA5E-EE9A623103E2}"/>
+                <a16:creationId xmlns:a16="http://schemas.microsoft.com/office/drawing/2014/main" id="{0ACB729D-53D1-403C-BA1A-39316E1CB467}"/>
               </a:ext>
             </a:extLst>
           </p:cNvPr>
@@ -11538,7 +11738,7 @@
           <p:cNvPr id="13" name="">
             <a:extLst xmlns:a="http://schemas.openxmlformats.org/drawingml/2006/main">
               <a:ext uri="{FF2B5EF4-FFF2-40B4-BE49-F238E27FC236}">
-                <a16:creationId xmlns:a16="http://schemas.microsoft.com/office/drawing/2014/main" id="{59A68AA4-FD51-41A8-A934-2F1E9525FB00}"/>
+                <a16:creationId xmlns:a16="http://schemas.microsoft.com/office/drawing/2014/main" id="{F092DAC3-CF39-4ACB-AB0F-1AEDBB59F6AD}"/>
               </a:ext>
             </a:extLst>
           </p:cNvPr>
@@ -11570,7 +11770,7 @@
           <p:cNvPr id="14" name="">
             <a:extLst xmlns:a="http://schemas.openxmlformats.org/drawingml/2006/main">
               <a:ext uri="{FF2B5EF4-FFF2-40B4-BE49-F238E27FC236}">
-                <a16:creationId xmlns:a16="http://schemas.microsoft.com/office/drawing/2014/main" id="{026DAB66-6AA7-4714-B703-97BC341413A3}"/>
+                <a16:creationId xmlns:a16="http://schemas.microsoft.com/office/drawing/2014/main" id="{1A7E6F09-A749-4F30-9966-265B546FCA25}"/>
               </a:ext>
             </a:extLst>
           </p:cNvPr>
@@ -11627,7 +11827,7 @@
           <p:cNvPr id="15" name="">
             <a:extLst xmlns:a="http://schemas.openxmlformats.org/drawingml/2006/main">
               <a:ext uri="{FF2B5EF4-FFF2-40B4-BE49-F238E27FC236}">
-                <a16:creationId xmlns:a16="http://schemas.microsoft.com/office/drawing/2014/main" id="{F0F9DB3A-4E14-4C26-9C38-EF44BEA51701}"/>
+                <a16:creationId xmlns:a16="http://schemas.microsoft.com/office/drawing/2014/main" id="{87416E59-3A80-4DAC-B676-9159747B99AE}"/>
               </a:ext>
             </a:extLst>
           </p:cNvPr>
@@ -11682,7 +11882,7 @@
     </p:spTree>
     <p:extLst>
       <p:ext uri="{BB962C8B-B14F-4D97-AF65-F5344CB8AC3E}">
-        <p14:creationId xmlns:p14="http://schemas.microsoft.com/office/powerpoint/2010/main" val="902694527"/>
+        <p14:creationId xmlns:p14="http://schemas.microsoft.com/office/powerpoint/2010/main" val="595168419"/>
       </p:ext>
     </p:extLst>
   </p:cSld>
@@ -11837,7 +12037,7 @@
           <p:cNvPr id="23" name="">
             <a:extLst xmlns:a="http://schemas.openxmlformats.org/drawingml/2006/main">
               <a:ext uri="{FF2B5EF4-FFF2-40B4-BE49-F238E27FC236}">
-                <a16:creationId xmlns:a16="http://schemas.microsoft.com/office/drawing/2014/main" id="{E9384449-51B0-4C92-900A-C7820B7710C8}"/>
+                <a16:creationId xmlns:a16="http://schemas.microsoft.com/office/drawing/2014/main" id="{FA61C79E-AD1C-4DCA-BFDE-1C81BE23161C}"/>
               </a:ext>
             </a:extLst>
           </p:cNvPr>
@@ -11869,7 +12069,7 @@
           <p:cNvPr id="2" name="">
             <a:extLst xmlns:a="http://schemas.openxmlformats.org/drawingml/2006/main">
               <a:ext uri="{FF2B5EF4-FFF2-40B4-BE49-F238E27FC236}">
-                <a16:creationId xmlns:a16="http://schemas.microsoft.com/office/drawing/2014/main" id="{0C55BF8C-0B49-4A0D-8DD2-F30A37D2E900}"/>
+                <a16:creationId xmlns:a16="http://schemas.microsoft.com/office/drawing/2014/main" id="{27DDED03-F906-426F-BDD8-44023DF71990}"/>
               </a:ext>
             </a:extLst>
           </p:cNvPr>
@@ -11926,7 +12126,7 @@
           <p:cNvPr id="3" name="">
             <a:extLst xmlns:a="http://schemas.openxmlformats.org/drawingml/2006/main">
               <a:ext uri="{FF2B5EF4-FFF2-40B4-BE49-F238E27FC236}">
-                <a16:creationId xmlns:a16="http://schemas.microsoft.com/office/drawing/2014/main" id="{037A19D4-D51B-498E-A440-67C614E9AB24}"/>
+                <a16:creationId xmlns:a16="http://schemas.microsoft.com/office/drawing/2014/main" id="{BD34AE95-6B68-4611-8C27-0A4F575521C0}"/>
               </a:ext>
             </a:extLst>
           </p:cNvPr>
@@ -11958,7 +12158,7 @@
           <p:cNvPr id="4" name="">
             <a:extLst xmlns:a="http://schemas.openxmlformats.org/drawingml/2006/main">
               <a:ext uri="{FF2B5EF4-FFF2-40B4-BE49-F238E27FC236}">
-                <a16:creationId xmlns:a16="http://schemas.microsoft.com/office/drawing/2014/main" id="{C56F3EC9-1D0A-47DD-BAC8-2E02C626373B}"/>
+                <a16:creationId xmlns:a16="http://schemas.microsoft.com/office/drawing/2014/main" id="{5CFD045B-32E3-4B4F-AEAB-B096E0A3C3D8}"/>
               </a:ext>
             </a:extLst>
           </p:cNvPr>
@@ -12015,7 +12215,7 @@
           <p:cNvPr id="5" name="">
             <a:extLst xmlns:a="http://schemas.openxmlformats.org/drawingml/2006/main">
               <a:ext uri="{FF2B5EF4-FFF2-40B4-BE49-F238E27FC236}">
-                <a16:creationId xmlns:a16="http://schemas.microsoft.com/office/drawing/2014/main" id="{6BC02A2A-804E-4EEA-AB7E-C9D19A3682CA}"/>
+                <a16:creationId xmlns:a16="http://schemas.microsoft.com/office/drawing/2014/main" id="{69EF5E87-83FD-4FD8-AAE7-2F0A8365522B}"/>
               </a:ext>
             </a:extLst>
           </p:cNvPr>
@@ -12072,7 +12272,7 @@
           <p:cNvPr id="6" name="">
             <a:extLst xmlns:a="http://schemas.openxmlformats.org/drawingml/2006/main">
               <a:ext uri="{FF2B5EF4-FFF2-40B4-BE49-F238E27FC236}">
-                <a16:creationId xmlns:a16="http://schemas.microsoft.com/office/drawing/2014/main" id="{D2DABF84-1092-42B4-8B17-49A30A1D7915}"/>
+                <a16:creationId xmlns:a16="http://schemas.microsoft.com/office/drawing/2014/main" id="{4D27F82A-A07B-4324-865E-A10B1368C1E8}"/>
               </a:ext>
             </a:extLst>
           </p:cNvPr>
@@ -12129,7 +12329,7 @@
           <p:cNvPr id="7" name="">
             <a:extLst xmlns:a="http://schemas.openxmlformats.org/drawingml/2006/main">
               <a:ext uri="{FF2B5EF4-FFF2-40B4-BE49-F238E27FC236}">
-                <a16:creationId xmlns:a16="http://schemas.microsoft.com/office/drawing/2014/main" id="{7AF59CC8-2DEF-4216-8EDE-BD3D2147F045}"/>
+                <a16:creationId xmlns:a16="http://schemas.microsoft.com/office/drawing/2014/main" id="{EB560C3F-7423-40E9-B149-394EBF49F0A3}"/>
               </a:ext>
             </a:extLst>
           </p:cNvPr>
@@ -12161,7 +12361,7 @@
           <p:cNvPr id="8" name="">
             <a:extLst xmlns:a="http://schemas.openxmlformats.org/drawingml/2006/main">
               <a:ext uri="{FF2B5EF4-FFF2-40B4-BE49-F238E27FC236}">
-                <a16:creationId xmlns:a16="http://schemas.microsoft.com/office/drawing/2014/main" id="{B5301712-4D3A-46B2-A1FB-3974E581A42D}"/>
+                <a16:creationId xmlns:a16="http://schemas.microsoft.com/office/drawing/2014/main" id="{7F32D123-F5CF-43AD-BEFA-5B22FA13968E}"/>
               </a:ext>
             </a:extLst>
           </p:cNvPr>
@@ -12218,7 +12418,7 @@
           <p:cNvPr id="9" name="">
             <a:extLst xmlns:a="http://schemas.openxmlformats.org/drawingml/2006/main">
               <a:ext uri="{FF2B5EF4-FFF2-40B4-BE49-F238E27FC236}">
-                <a16:creationId xmlns:a16="http://schemas.microsoft.com/office/drawing/2014/main" id="{ACF4BCEC-D525-4B57-9B61-D73BF89A52B9}"/>
+                <a16:creationId xmlns:a16="http://schemas.microsoft.com/office/drawing/2014/main" id="{EA7C9D3E-B978-4203-BC30-8641EF25E38A}"/>
               </a:ext>
             </a:extLst>
           </p:cNvPr>
@@ -12275,7 +12475,7 @@
           <p:cNvPr id="10" name="">
             <a:extLst xmlns:a="http://schemas.openxmlformats.org/drawingml/2006/main">
               <a:ext uri="{FF2B5EF4-FFF2-40B4-BE49-F238E27FC236}">
-                <a16:creationId xmlns:a16="http://schemas.microsoft.com/office/drawing/2014/main" id="{33E3D4FE-D80B-4B3A-8398-C514248F1E96}"/>
+                <a16:creationId xmlns:a16="http://schemas.microsoft.com/office/drawing/2014/main" id="{269BB018-2A3D-49CA-888E-A76BEE2B35E9}"/>
               </a:ext>
             </a:extLst>
           </p:cNvPr>
@@ -12309,7 +12509,7 @@
           <p:cNvPr id="11" name="">
             <a:extLst xmlns:a="http://schemas.openxmlformats.org/drawingml/2006/main">
               <a:ext uri="{FF2B5EF4-FFF2-40B4-BE49-F238E27FC236}">
-                <a16:creationId xmlns:a16="http://schemas.microsoft.com/office/drawing/2014/main" id="{E9E163E0-1BE1-4239-87A4-8CF3264691E8}"/>
+                <a16:creationId xmlns:a16="http://schemas.microsoft.com/office/drawing/2014/main" id="{80439469-6C1A-4461-9445-5E6A74F4B05D}"/>
               </a:ext>
             </a:extLst>
           </p:cNvPr>
@@ -12341,7 +12541,7 @@
           <p:cNvPr id="12" name="">
             <a:extLst xmlns:a="http://schemas.openxmlformats.org/drawingml/2006/main">
               <a:ext uri="{FF2B5EF4-FFF2-40B4-BE49-F238E27FC236}">
-                <a16:creationId xmlns:a16="http://schemas.microsoft.com/office/drawing/2014/main" id="{8A8F3E50-CDBA-420B-BBBC-3339A8C2D1FB}"/>
+                <a16:creationId xmlns:a16="http://schemas.microsoft.com/office/drawing/2014/main" id="{D4E43B7D-60E2-48EA-AE03-8B4161324CF1}"/>
               </a:ext>
             </a:extLst>
           </p:cNvPr>
@@ -12398,7 +12598,7 @@
           <p:cNvPr id="13" name="">
             <a:extLst xmlns:a="http://schemas.openxmlformats.org/drawingml/2006/main">
               <a:ext uri="{FF2B5EF4-FFF2-40B4-BE49-F238E27FC236}">
-                <a16:creationId xmlns:a16="http://schemas.microsoft.com/office/drawing/2014/main" id="{5D3B4ADC-E34D-4F00-84E4-8FDEB9338A0A}"/>
+                <a16:creationId xmlns:a16="http://schemas.microsoft.com/office/drawing/2014/main" id="{7DC4E9CF-EC75-4368-920E-3CFACFD5F555}"/>
               </a:ext>
             </a:extLst>
           </p:cNvPr>
@@ -12455,7 +12655,7 @@
           <p:cNvPr id="14" name="">
             <a:extLst xmlns:a="http://schemas.openxmlformats.org/drawingml/2006/main">
               <a:ext uri="{FF2B5EF4-FFF2-40B4-BE49-F238E27FC236}">
-                <a16:creationId xmlns:a16="http://schemas.microsoft.com/office/drawing/2014/main" id="{E39E8343-CFAF-4DE6-B840-95D39D1D1709}"/>
+                <a16:creationId xmlns:a16="http://schemas.microsoft.com/office/drawing/2014/main" id="{0F63437D-B1B7-4A13-BFFA-4F7D53BAE01D}"/>
               </a:ext>
             </a:extLst>
           </p:cNvPr>
@@ -12489,7 +12689,7 @@
           <p:cNvPr id="15" name="">
             <a:extLst xmlns:a="http://schemas.openxmlformats.org/drawingml/2006/main">
               <a:ext uri="{FF2B5EF4-FFF2-40B4-BE49-F238E27FC236}">
-                <a16:creationId xmlns:a16="http://schemas.microsoft.com/office/drawing/2014/main" id="{54530D50-A9A8-4D0C-88AC-6288961A03F2}"/>
+                <a16:creationId xmlns:a16="http://schemas.microsoft.com/office/drawing/2014/main" id="{A051EBCF-10EA-45CE-A944-F91A3324D500}"/>
               </a:ext>
             </a:extLst>
           </p:cNvPr>
@@ -12521,7 +12721,7 @@
           <p:cNvPr id="16" name="">
             <a:extLst xmlns:a="http://schemas.openxmlformats.org/drawingml/2006/main">
               <a:ext uri="{FF2B5EF4-FFF2-40B4-BE49-F238E27FC236}">
-                <a16:creationId xmlns:a16="http://schemas.microsoft.com/office/drawing/2014/main" id="{7D203F32-7634-471A-BDA9-C956C49B3955}"/>
+                <a16:creationId xmlns:a16="http://schemas.microsoft.com/office/drawing/2014/main" id="{56D990C2-3C8E-4369-9830-E24FC7CB450D}"/>
               </a:ext>
             </a:extLst>
           </p:cNvPr>
@@ -12578,7 +12778,7 @@
           <p:cNvPr id="17" name="">
             <a:extLst xmlns:a="http://schemas.openxmlformats.org/drawingml/2006/main">
               <a:ext uri="{FF2B5EF4-FFF2-40B4-BE49-F238E27FC236}">
-                <a16:creationId xmlns:a16="http://schemas.microsoft.com/office/drawing/2014/main" id="{F9AC167A-4E8E-47A1-AA96-377657ABAAB5}"/>
+                <a16:creationId xmlns:a16="http://schemas.microsoft.com/office/drawing/2014/main" id="{0C98AD62-8002-4CA2-B4B5-2B3532C96698}"/>
               </a:ext>
             </a:extLst>
           </p:cNvPr>
@@ -12635,7 +12835,7 @@
           <p:cNvPr id="18" name="">
             <a:extLst xmlns:a="http://schemas.openxmlformats.org/drawingml/2006/main">
               <a:ext uri="{FF2B5EF4-FFF2-40B4-BE49-F238E27FC236}">
-                <a16:creationId xmlns:a16="http://schemas.microsoft.com/office/drawing/2014/main" id="{0A5742B7-11BC-4572-BC4E-E363C9D4FCA1}"/>
+                <a16:creationId xmlns:a16="http://schemas.microsoft.com/office/drawing/2014/main" id="{C7494352-351B-4795-A0CC-F1BA4736044C}"/>
               </a:ext>
             </a:extLst>
           </p:cNvPr>
@@ -12669,7 +12869,7 @@
           <p:cNvPr id="19" name="">
             <a:extLst xmlns:a="http://schemas.openxmlformats.org/drawingml/2006/main">
               <a:ext uri="{FF2B5EF4-FFF2-40B4-BE49-F238E27FC236}">
-                <a16:creationId xmlns:a16="http://schemas.microsoft.com/office/drawing/2014/main" id="{A1C2463D-3938-43DF-B1BE-95CD9109E96C}"/>
+                <a16:creationId xmlns:a16="http://schemas.microsoft.com/office/drawing/2014/main" id="{9A56FAF8-5386-4D0D-8AD5-CF0EED8EAFE8}"/>
               </a:ext>
             </a:extLst>
           </p:cNvPr>
@@ -12701,7 +12901,7 @@
           <p:cNvPr id="20" name="">
             <a:extLst xmlns:a="http://schemas.openxmlformats.org/drawingml/2006/main">
               <a:ext uri="{FF2B5EF4-FFF2-40B4-BE49-F238E27FC236}">
-                <a16:creationId xmlns:a16="http://schemas.microsoft.com/office/drawing/2014/main" id="{A4D2DED8-6948-4F34-838E-528FBB7601A3}"/>
+                <a16:creationId xmlns:a16="http://schemas.microsoft.com/office/drawing/2014/main" id="{D20C07DB-1630-422F-B773-D9B359AAC9D3}"/>
               </a:ext>
             </a:extLst>
           </p:cNvPr>
@@ -12758,7 +12958,7 @@
           <p:cNvPr id="21" name="">
             <a:extLst xmlns:a="http://schemas.openxmlformats.org/drawingml/2006/main">
               <a:ext uri="{FF2B5EF4-FFF2-40B4-BE49-F238E27FC236}">
-                <a16:creationId xmlns:a16="http://schemas.microsoft.com/office/drawing/2014/main" id="{EE49FE81-8545-4E70-9514-26E42624B82D}"/>
+                <a16:creationId xmlns:a16="http://schemas.microsoft.com/office/drawing/2014/main" id="{3ED981FC-1871-4FFC-9E19-39B1060653D6}"/>
               </a:ext>
             </a:extLst>
           </p:cNvPr>
@@ -12815,7 +13015,7 @@
           <p:cNvPr id="22" name="">
             <a:extLst xmlns:a="http://schemas.openxmlformats.org/drawingml/2006/main">
               <a:ext uri="{FF2B5EF4-FFF2-40B4-BE49-F238E27FC236}">
-                <a16:creationId xmlns:a16="http://schemas.microsoft.com/office/drawing/2014/main" id="{04EDF688-B7D0-4459-A145-03B7E524A6EF}"/>
+                <a16:creationId xmlns:a16="http://schemas.microsoft.com/office/drawing/2014/main" id="{A9994C5B-84C3-4F85-8500-C03D73F3A675}"/>
               </a:ext>
             </a:extLst>
           </p:cNvPr>
@@ -12870,7 +13070,7 @@
     </p:spTree>
     <p:extLst>
       <p:ext uri="{BB962C8B-B14F-4D97-AF65-F5344CB8AC3E}">
-        <p14:creationId xmlns:p14="http://schemas.microsoft.com/office/powerpoint/2010/main" val="228173514"/>
+        <p14:creationId xmlns:p14="http://schemas.microsoft.com/office/powerpoint/2010/main" val="407451515"/>
       </p:ext>
     </p:extLst>
   </p:cSld>
@@ -13071,7 +13271,7 @@
           <p:cNvPr id="22" name="">
             <a:extLst xmlns:a="http://schemas.openxmlformats.org/drawingml/2006/main">
               <a:ext uri="{FF2B5EF4-FFF2-40B4-BE49-F238E27FC236}">
-                <a16:creationId xmlns:a16="http://schemas.microsoft.com/office/drawing/2014/main" id="{629FF6FC-5C34-4AAE-945D-1C01A8C30403}"/>
+                <a16:creationId xmlns:a16="http://schemas.microsoft.com/office/drawing/2014/main" id="{471E2324-0D1B-4D4C-8B07-7A13E0B2369E}"/>
               </a:ext>
             </a:extLst>
           </p:cNvPr>
@@ -13103,7 +13303,7 @@
           <p:cNvPr id="2" name="">
             <a:extLst xmlns:a="http://schemas.openxmlformats.org/drawingml/2006/main">
               <a:ext uri="{FF2B5EF4-FFF2-40B4-BE49-F238E27FC236}">
-                <a16:creationId xmlns:a16="http://schemas.microsoft.com/office/drawing/2014/main" id="{59714375-92D0-4B08-90FE-6C1F93ABF307}"/>
+                <a16:creationId xmlns:a16="http://schemas.microsoft.com/office/drawing/2014/main" id="{E07A5987-C4C1-4A89-B88E-B319D3C0135D}"/>
               </a:ext>
             </a:extLst>
           </p:cNvPr>
@@ -13160,7 +13360,7 @@
           <p:cNvPr id="3" name="">
             <a:extLst xmlns:a="http://schemas.openxmlformats.org/drawingml/2006/main">
               <a:ext uri="{FF2B5EF4-FFF2-40B4-BE49-F238E27FC236}">
-                <a16:creationId xmlns:a16="http://schemas.microsoft.com/office/drawing/2014/main" id="{AEDD0A6C-3F75-47E5-A4CF-2C227580EEEB}"/>
+                <a16:creationId xmlns:a16="http://schemas.microsoft.com/office/drawing/2014/main" id="{7991551A-0F71-49EB-BD74-7AE65EA1F165}"/>
               </a:ext>
             </a:extLst>
           </p:cNvPr>
@@ -13192,7 +13392,7 @@
           <p:cNvPr id="4" name="">
             <a:extLst xmlns:a="http://schemas.openxmlformats.org/drawingml/2006/main">
               <a:ext uri="{FF2B5EF4-FFF2-40B4-BE49-F238E27FC236}">
-                <a16:creationId xmlns:a16="http://schemas.microsoft.com/office/drawing/2014/main" id="{3A572679-0BAB-415E-AD4B-C1BBCA1C7A0F}"/>
+                <a16:creationId xmlns:a16="http://schemas.microsoft.com/office/drawing/2014/main" id="{9F3CB070-BAB1-4141-9A0B-9EDE225FAE83}"/>
               </a:ext>
             </a:extLst>
           </p:cNvPr>
@@ -13249,7 +13449,7 @@
           <p:cNvPr id="5" name="">
             <a:extLst xmlns:a="http://schemas.openxmlformats.org/drawingml/2006/main">
               <a:ext uri="{FF2B5EF4-FFF2-40B4-BE49-F238E27FC236}">
-                <a16:creationId xmlns:a16="http://schemas.microsoft.com/office/drawing/2014/main" id="{CC546A16-A6AC-4FEA-9850-9D5832D49C28}"/>
+                <a16:creationId xmlns:a16="http://schemas.microsoft.com/office/drawing/2014/main" id="{26CB3330-5C9C-4C24-81A0-B7709E2A7FF8}"/>
               </a:ext>
             </a:extLst>
           </p:cNvPr>
@@ -13306,7 +13506,7 @@
           <p:cNvPr id="6" name="">
             <a:extLst xmlns:a="http://schemas.openxmlformats.org/drawingml/2006/main">
               <a:ext uri="{FF2B5EF4-FFF2-40B4-BE49-F238E27FC236}">
-                <a16:creationId xmlns:a16="http://schemas.microsoft.com/office/drawing/2014/main" id="{6C774DF6-37B4-40B2-9118-D0AA698AEF4A}"/>
+                <a16:creationId xmlns:a16="http://schemas.microsoft.com/office/drawing/2014/main" id="{7A23B80C-8B9F-4739-874A-1FD4C2BB65EC}"/>
               </a:ext>
             </a:extLst>
           </p:cNvPr>
@@ -13363,7 +13563,7 @@
           <p:cNvPr id="7" name="">
             <a:extLst xmlns:a="http://schemas.openxmlformats.org/drawingml/2006/main">
               <a:ext uri="{FF2B5EF4-FFF2-40B4-BE49-F238E27FC236}">
-                <a16:creationId xmlns:a16="http://schemas.microsoft.com/office/drawing/2014/main" id="{AEDBC623-0934-4270-8455-2BAFAE8F4104}"/>
+                <a16:creationId xmlns:a16="http://schemas.microsoft.com/office/drawing/2014/main" id="{EF6D1A2E-BD32-4264-99C0-B7BE45761653}"/>
               </a:ext>
             </a:extLst>
           </p:cNvPr>
@@ -13395,7 +13595,7 @@
           <p:cNvPr id="8" name="">
             <a:extLst xmlns:a="http://schemas.openxmlformats.org/drawingml/2006/main">
               <a:ext uri="{FF2B5EF4-FFF2-40B4-BE49-F238E27FC236}">
-                <a16:creationId xmlns:a16="http://schemas.microsoft.com/office/drawing/2014/main" id="{7DB47E00-3B13-449F-9E6B-DF3B5F393DA0}"/>
+                <a16:creationId xmlns:a16="http://schemas.microsoft.com/office/drawing/2014/main" id="{40C3F5DB-4756-4637-9593-DDB5B93C6C50}"/>
               </a:ext>
             </a:extLst>
           </p:cNvPr>
@@ -13452,7 +13652,7 @@
           <p:cNvPr id="9" name="">
             <a:extLst xmlns:a="http://schemas.openxmlformats.org/drawingml/2006/main">
               <a:ext uri="{FF2B5EF4-FFF2-40B4-BE49-F238E27FC236}">
-                <a16:creationId xmlns:a16="http://schemas.microsoft.com/office/drawing/2014/main" id="{998025ED-E7DF-4867-9A43-30910BBBE67B}"/>
+                <a16:creationId xmlns:a16="http://schemas.microsoft.com/office/drawing/2014/main" id="{C6129628-5C87-4889-A6B6-88169238A610}"/>
               </a:ext>
             </a:extLst>
           </p:cNvPr>
@@ -13509,7 +13709,7 @@
           <p:cNvPr id="10" name="">
             <a:extLst xmlns:a="http://schemas.openxmlformats.org/drawingml/2006/main">
               <a:ext uri="{FF2B5EF4-FFF2-40B4-BE49-F238E27FC236}">
-                <a16:creationId xmlns:a16="http://schemas.microsoft.com/office/drawing/2014/main" id="{40104492-8F33-449A-AB82-F1987D64D72B}"/>
+                <a16:creationId xmlns:a16="http://schemas.microsoft.com/office/drawing/2014/main" id="{4A83B522-926F-46E0-AABB-70464D293709}"/>
               </a:ext>
             </a:extLst>
           </p:cNvPr>
@@ -13543,7 +13743,7 @@
           <p:cNvPr id="11" name="">
             <a:extLst xmlns:a="http://schemas.openxmlformats.org/drawingml/2006/main">
               <a:ext uri="{FF2B5EF4-FFF2-40B4-BE49-F238E27FC236}">
-                <a16:creationId xmlns:a16="http://schemas.microsoft.com/office/drawing/2014/main" id="{98558F52-5462-43E6-8381-9FAD2AFBDAD2}"/>
+                <a16:creationId xmlns:a16="http://schemas.microsoft.com/office/drawing/2014/main" id="{40B0E12B-3383-427E-90EA-8FE314448131}"/>
               </a:ext>
             </a:extLst>
           </p:cNvPr>
@@ -13575,7 +13775,7 @@
           <p:cNvPr id="12" name="">
             <a:extLst xmlns:a="http://schemas.openxmlformats.org/drawingml/2006/main">
               <a:ext uri="{FF2B5EF4-FFF2-40B4-BE49-F238E27FC236}">
-                <a16:creationId xmlns:a16="http://schemas.microsoft.com/office/drawing/2014/main" id="{C1885F90-320C-4A12-B630-78EFCFA3B833}"/>
+                <a16:creationId xmlns:a16="http://schemas.microsoft.com/office/drawing/2014/main" id="{E6B4B59B-DAAB-4868-B892-BCEAD373F4C8}"/>
               </a:ext>
             </a:extLst>
           </p:cNvPr>
@@ -13632,7 +13832,7 @@
           <p:cNvPr id="13" name="">
             <a:extLst xmlns:a="http://schemas.openxmlformats.org/drawingml/2006/main">
               <a:ext uri="{FF2B5EF4-FFF2-40B4-BE49-F238E27FC236}">
-                <a16:creationId xmlns:a16="http://schemas.microsoft.com/office/drawing/2014/main" id="{0DF95034-A0C2-48B3-8832-F03BE946A2F7}"/>
+                <a16:creationId xmlns:a16="http://schemas.microsoft.com/office/drawing/2014/main" id="{BC59925A-7E61-4928-86ED-C54D1E129C23}"/>
               </a:ext>
             </a:extLst>
           </p:cNvPr>
@@ -13689,7 +13889,7 @@
           <p:cNvPr id="14" name="">
             <a:extLst xmlns:a="http://schemas.openxmlformats.org/drawingml/2006/main">
               <a:ext uri="{FF2B5EF4-FFF2-40B4-BE49-F238E27FC236}">
-                <a16:creationId xmlns:a16="http://schemas.microsoft.com/office/drawing/2014/main" id="{22EAF7A6-AF22-4026-AD37-074E3B1E1413}"/>
+                <a16:creationId xmlns:a16="http://schemas.microsoft.com/office/drawing/2014/main" id="{DDBDBACB-275F-4F49-8EE3-02AD5168FA1D}"/>
               </a:ext>
             </a:extLst>
           </p:cNvPr>
@@ -13723,7 +13923,7 @@
           <p:cNvPr id="15" name="">
             <a:extLst xmlns:a="http://schemas.openxmlformats.org/drawingml/2006/main">
               <a:ext uri="{FF2B5EF4-FFF2-40B4-BE49-F238E27FC236}">
-                <a16:creationId xmlns:a16="http://schemas.microsoft.com/office/drawing/2014/main" id="{F824BDF5-03EA-498E-82F5-ABD6C25C3258}"/>
+                <a16:creationId xmlns:a16="http://schemas.microsoft.com/office/drawing/2014/main" id="{F7378476-DF9A-4E47-9918-3CF86EC3D621}"/>
               </a:ext>
             </a:extLst>
           </p:cNvPr>
@@ -13755,7 +13955,7 @@
           <p:cNvPr id="16" name="">
             <a:extLst xmlns:a="http://schemas.openxmlformats.org/drawingml/2006/main">
               <a:ext uri="{FF2B5EF4-FFF2-40B4-BE49-F238E27FC236}">
-                <a16:creationId xmlns:a16="http://schemas.microsoft.com/office/drawing/2014/main" id="{1B73E18E-9A8A-4844-844D-FDF396C6FAC4}"/>
+                <a16:creationId xmlns:a16="http://schemas.microsoft.com/office/drawing/2014/main" id="{02BB11F5-1587-4BD3-9745-42CF5A5A99FA}"/>
               </a:ext>
             </a:extLst>
           </p:cNvPr>
@@ -13812,7 +14012,7 @@
           <p:cNvPr id="17" name="">
             <a:extLst xmlns:a="http://schemas.openxmlformats.org/drawingml/2006/main">
               <a:ext uri="{FF2B5EF4-FFF2-40B4-BE49-F238E27FC236}">
-                <a16:creationId xmlns:a16="http://schemas.microsoft.com/office/drawing/2014/main" id="{55865E88-3ED8-4795-B001-776B44C32581}"/>
+                <a16:creationId xmlns:a16="http://schemas.microsoft.com/office/drawing/2014/main" id="{6DE725C2-2AB9-439B-8B8C-A1CDCF55A82F}"/>
               </a:ext>
             </a:extLst>
           </p:cNvPr>
@@ -13869,7 +14069,7 @@
           <p:cNvPr id="18" name="">
             <a:extLst xmlns:a="http://schemas.openxmlformats.org/drawingml/2006/main">
               <a:ext uri="{FF2B5EF4-FFF2-40B4-BE49-F238E27FC236}">
-                <a16:creationId xmlns:a16="http://schemas.microsoft.com/office/drawing/2014/main" id="{8A6E3137-3FA0-473B-8B25-04A2AE02FD11}"/>
+                <a16:creationId xmlns:a16="http://schemas.microsoft.com/office/drawing/2014/main" id="{DA1B1A3C-2C17-4708-83FB-932D618ACD2C}"/>
               </a:ext>
             </a:extLst>
           </p:cNvPr>
@@ -13903,7 +14103,7 @@
           <p:cNvPr id="19" name="">
             <a:extLst xmlns:a="http://schemas.openxmlformats.org/drawingml/2006/main">
               <a:ext uri="{FF2B5EF4-FFF2-40B4-BE49-F238E27FC236}">
-                <a16:creationId xmlns:a16="http://schemas.microsoft.com/office/drawing/2014/main" id="{A1F3C3FA-A3E4-4BD8-85DC-F776EB5B8BBE}"/>
+                <a16:creationId xmlns:a16="http://schemas.microsoft.com/office/drawing/2014/main" id="{688E68F0-DD09-4B96-A049-3836E0377898}"/>
               </a:ext>
             </a:extLst>
           </p:cNvPr>
@@ -13935,7 +14135,7 @@
           <p:cNvPr id="20" name="">
             <a:extLst xmlns:a="http://schemas.openxmlformats.org/drawingml/2006/main">
               <a:ext uri="{FF2B5EF4-FFF2-40B4-BE49-F238E27FC236}">
-                <a16:creationId xmlns:a16="http://schemas.microsoft.com/office/drawing/2014/main" id="{5D106262-C1F5-4EF0-9DAB-AA6BAD83D9B7}"/>
+                <a16:creationId xmlns:a16="http://schemas.microsoft.com/office/drawing/2014/main" id="{7B6BDC10-7BD2-444A-BA7E-382110CDD1F0}"/>
               </a:ext>
             </a:extLst>
           </p:cNvPr>
@@ -13992,7 +14192,7 @@
           <p:cNvPr id="21" name="">
             <a:extLst xmlns:a="http://schemas.openxmlformats.org/drawingml/2006/main">
               <a:ext uri="{FF2B5EF4-FFF2-40B4-BE49-F238E27FC236}">
-                <a16:creationId xmlns:a16="http://schemas.microsoft.com/office/drawing/2014/main" id="{6CA81522-1A2A-4EC8-AE3D-E78D016FE798}"/>
+                <a16:creationId xmlns:a16="http://schemas.microsoft.com/office/drawing/2014/main" id="{A3247038-B584-4159-BFAA-9865E3F6EBEF}"/>
               </a:ext>
             </a:extLst>
           </p:cNvPr>
@@ -14047,7 +14247,7 @@
     </p:spTree>
     <p:extLst>
       <p:ext uri="{BB962C8B-B14F-4D97-AF65-F5344CB8AC3E}">
-        <p14:creationId xmlns:p14="http://schemas.microsoft.com/office/powerpoint/2010/main" val="522047822"/>
+        <p14:creationId xmlns:p14="http://schemas.microsoft.com/office/powerpoint/2010/main" val="1309235689"/>
       </p:ext>
     </p:extLst>
   </p:cSld>
